--- a/skills/presentation-template-library/skills/artifact-template-blue-flame-operations/assets/reference.pptx
+++ b/skills/presentation-template-library/skills/artifact-template-blue-flame-operations/assets/reference.pptx
@@ -729,8 +729,8 @@
           <p:nvPr/>
         </p:nvPicPr>
         <p:blipFill>
-          <a:blip xmlns:r="http://schemas.openxmlformats.org/officeDocument/2006/relationships" xmlns:a="http://schemas.openxmlformats.org/drawingml/2006/main" r:embed="rIdOfficeKitImagec7b73f8fac405495_1"/>
-          <a:srcRect xmlns:a="http://schemas.openxmlformats.org/drawingml/2006/main" l="0" t="34171" r="0" b="34171"/>
+          <a:blip xmlns:r="http://schemas.openxmlformats.org/officeDocument/2006/relationships" xmlns:a="http://schemas.openxmlformats.org/drawingml/2006/main" r:embed="rIdOfficeKitImage33b8c33a8fc3d613_1"/>
+          <a:srcRect xmlns:a="http://schemas.openxmlformats.org/drawingml/2006/main" l="0" t="34180" r="0" b="34180"/>
           <a:stretch xmlns:a="http://schemas.openxmlformats.org/drawingml/2006/main">
             <a:fillRect/>
           </a:stretch>
@@ -3770,7 +3770,7 @@
         </p:xfrm>
         <a:graphic xmlns:a="http://schemas.openxmlformats.org/drawingml/2006/main">
           <a:graphicData uri="http://schemas.openxmlformats.org/drawingml/2006/chart">
-            <c:chart xmlns:r="http://schemas.openxmlformats.org/officeDocument/2006/relationships" xmlns:c="http://schemas.openxmlformats.org/drawingml/2006/chart" r:id="R21694fbbee4e45ee"/>
+            <c:chart xmlns:r="http://schemas.openxmlformats.org/officeDocument/2006/relationships" xmlns:c="http://schemas.openxmlformats.org/drawingml/2006/chart" r:id="Rf2c469db7c764307"/>
           </a:graphicData>
         </a:graphic>
       </p:graphicFrame>
@@ -3788,7 +3788,7 @@
         </p:xfrm>
         <a:graphic xmlns:a="http://schemas.openxmlformats.org/drawingml/2006/main">
           <a:graphicData uri="http://schemas.openxmlformats.org/drawingml/2006/chart">
-            <c:chart xmlns:r="http://schemas.openxmlformats.org/officeDocument/2006/relationships" xmlns:c="http://schemas.openxmlformats.org/drawingml/2006/chart" r:id="R043a902703914819"/>
+            <c:chart xmlns:r="http://schemas.openxmlformats.org/officeDocument/2006/relationships" xmlns:c="http://schemas.openxmlformats.org/drawingml/2006/chart" r:id="Rbdf421c5f80e4922"/>
           </a:graphicData>
         </a:graphic>
       </p:graphicFrame>
@@ -6086,7 +6086,7 @@
         </p:xfrm>
         <a:graphic xmlns:a="http://schemas.openxmlformats.org/drawingml/2006/main">
           <a:graphicData uri="http://schemas.openxmlformats.org/drawingml/2006/chart">
-            <c:chart xmlns:r="http://schemas.openxmlformats.org/officeDocument/2006/relationships" xmlns:c="http://schemas.openxmlformats.org/drawingml/2006/chart" r:id="R590ae263a79b4286"/>
+            <c:chart xmlns:r="http://schemas.openxmlformats.org/officeDocument/2006/relationships" xmlns:c="http://schemas.openxmlformats.org/drawingml/2006/chart" r:id="Rb3eb274cb5484fbb"/>
           </a:graphicData>
         </a:graphic>
       </p:graphicFrame>
@@ -6104,7 +6104,7 @@
         </p:xfrm>
         <a:graphic xmlns:a="http://schemas.openxmlformats.org/drawingml/2006/main">
           <a:graphicData uri="http://schemas.openxmlformats.org/drawingml/2006/chart">
-            <c:chart xmlns:r="http://schemas.openxmlformats.org/officeDocument/2006/relationships" xmlns:c="http://schemas.openxmlformats.org/drawingml/2006/chart" r:id="Rf28b73b025d14752"/>
+            <c:chart xmlns:r="http://schemas.openxmlformats.org/officeDocument/2006/relationships" xmlns:c="http://schemas.openxmlformats.org/drawingml/2006/chart" r:id="R7878947a10fc48be"/>
           </a:graphicData>
         </a:graphic>
       </p:graphicFrame>

--- a/skills/presentation-template-library/skills/artifact-template-blue-flame-operations/assets/reference.pptx
+++ b/skills/presentation-template-library/skills/artifact-template-blue-flame-operations/assets/reference.pptx
@@ -729,7 +729,7 @@
           <p:nvPr/>
         </p:nvPicPr>
         <p:blipFill>
-          <a:blip xmlns:r="http://schemas.openxmlformats.org/officeDocument/2006/relationships" xmlns:a="http://schemas.openxmlformats.org/drawingml/2006/main" r:embed="rIdOfficeKitImage33b8c33a8fc3d613_1"/>
+          <a:blip xmlns:r="http://schemas.openxmlformats.org/officeDocument/2006/relationships" xmlns:a="http://schemas.openxmlformats.org/drawingml/2006/main" r:embed="rIdOfficeKitImage59ee3aa5202fd02f_1"/>
           <a:srcRect xmlns:a="http://schemas.openxmlformats.org/drawingml/2006/main" l="0" t="34180" r="0" b="34180"/>
           <a:stretch xmlns:a="http://schemas.openxmlformats.org/drawingml/2006/main">
             <a:fillRect/>
@@ -3770,7 +3770,7 @@
         </p:xfrm>
         <a:graphic xmlns:a="http://schemas.openxmlformats.org/drawingml/2006/main">
           <a:graphicData uri="http://schemas.openxmlformats.org/drawingml/2006/chart">
-            <c:chart xmlns:r="http://schemas.openxmlformats.org/officeDocument/2006/relationships" xmlns:c="http://schemas.openxmlformats.org/drawingml/2006/chart" r:id="Rf2c469db7c764307"/>
+            <c:chart xmlns:r="http://schemas.openxmlformats.org/officeDocument/2006/relationships" xmlns:c="http://schemas.openxmlformats.org/drawingml/2006/chart" r:id="Re3a6d326d7c546e5"/>
           </a:graphicData>
         </a:graphic>
       </p:graphicFrame>
@@ -3788,7 +3788,7 @@
         </p:xfrm>
         <a:graphic xmlns:a="http://schemas.openxmlformats.org/drawingml/2006/main">
           <a:graphicData uri="http://schemas.openxmlformats.org/drawingml/2006/chart">
-            <c:chart xmlns:r="http://schemas.openxmlformats.org/officeDocument/2006/relationships" xmlns:c="http://schemas.openxmlformats.org/drawingml/2006/chart" r:id="Rbdf421c5f80e4922"/>
+            <c:chart xmlns:r="http://schemas.openxmlformats.org/officeDocument/2006/relationships" xmlns:c="http://schemas.openxmlformats.org/drawingml/2006/chart" r:id="Rd5540448384c4d98"/>
           </a:graphicData>
         </a:graphic>
       </p:graphicFrame>
@@ -6086,7 +6086,7 @@
         </p:xfrm>
         <a:graphic xmlns:a="http://schemas.openxmlformats.org/drawingml/2006/main">
           <a:graphicData uri="http://schemas.openxmlformats.org/drawingml/2006/chart">
-            <c:chart xmlns:r="http://schemas.openxmlformats.org/officeDocument/2006/relationships" xmlns:c="http://schemas.openxmlformats.org/drawingml/2006/chart" r:id="Rb3eb274cb5484fbb"/>
+            <c:chart xmlns:r="http://schemas.openxmlformats.org/officeDocument/2006/relationships" xmlns:c="http://schemas.openxmlformats.org/drawingml/2006/chart" r:id="R5495d9c7307b462b"/>
           </a:graphicData>
         </a:graphic>
       </p:graphicFrame>
@@ -6104,7 +6104,7 @@
         </p:xfrm>
         <a:graphic xmlns:a="http://schemas.openxmlformats.org/drawingml/2006/main">
           <a:graphicData uri="http://schemas.openxmlformats.org/drawingml/2006/chart">
-            <c:chart xmlns:r="http://schemas.openxmlformats.org/officeDocument/2006/relationships" xmlns:c="http://schemas.openxmlformats.org/drawingml/2006/chart" r:id="R7878947a10fc48be"/>
+            <c:chart xmlns:r="http://schemas.openxmlformats.org/officeDocument/2006/relationships" xmlns:c="http://schemas.openxmlformats.org/drawingml/2006/chart" r:id="Rc2d2191c9b8b48cd"/>
           </a:graphicData>
         </a:graphic>
       </p:graphicFrame>

--- a/skills/presentation-template-library/skills/artifact-template-blue-flame-operations/assets/reference.pptx
+++ b/skills/presentation-template-library/skills/artifact-template-blue-flame-operations/assets/reference.pptx
@@ -702,6 +702,16 @@
 <file path=ppt/slides/slide1.xml><?xml version="1.0" encoding="utf-8"?>
 <p:sld xmlns:p="http://schemas.openxmlformats.org/presentationml/2006/main">
   <p:cSld name="Opening claim">
+    <p:bg>
+      <p:bgPr>
+        <a:blipFill xmlns:a="http://schemas.openxmlformats.org/drawingml/2006/main">
+          <a:blip xmlns:r="http://schemas.openxmlformats.org/officeDocument/2006/relationships" r:embed="rIdOfficeKitImage59ee3aa5202fd02f_1"/>
+          <a:stretch>
+            <a:fillRect/>
+          </a:stretch>
+        </a:blipFill>
+      </p:bgPr>
+    </p:bg>
     <p:spTree>
       <p:nvGrpSpPr>
         <p:cNvPr id="1" name=""/>
@@ -716,38 +726,9 @@
           <a:chExt cx="0" cy="0"/>
         </a:xfrm>
       </p:grpSpPr>
-      <p:pic>
-        <p:nvPicPr>
-          <p:cNvPr id="2" name="artifact-template-blue-flame-operations-cover-field">
-            <a:extLst xmlns:a="http://schemas.openxmlformats.org/drawingml/2006/main">
-              <a:ext uri="{C183D7F6-B498-43B3-948B-1728B52AA6E4}">
-                <adec:decorative xmlns:adec="http://schemas.microsoft.com/office/drawing/2017/decorative" val="1"/>
-              </a:ext>
-            </a:extLst>
-          </p:cNvPr>
-          <p:cNvPicPr/>
-          <p:nvPr/>
-        </p:nvPicPr>
-        <p:blipFill>
-          <a:blip xmlns:r="http://schemas.openxmlformats.org/officeDocument/2006/relationships" xmlns:a="http://schemas.openxmlformats.org/drawingml/2006/main" r:embed="rIdOfficeKitImage59ee3aa5202fd02f_1"/>
-          <a:srcRect xmlns:a="http://schemas.openxmlformats.org/drawingml/2006/main" l="0" t="34180" r="0" b="34180"/>
-          <a:stretch xmlns:a="http://schemas.openxmlformats.org/drawingml/2006/main">
-            <a:fillRect/>
-          </a:stretch>
-        </p:blipFill>
-        <p:spPr>
-          <a:xfrm xmlns:a="http://schemas.openxmlformats.org/drawingml/2006/main">
-            <a:off x="0" y="0"/>
-            <a:ext cx="15240000" cy="8572500"/>
-          </a:xfrm>
-          <a:prstGeom xmlns:a="http://schemas.openxmlformats.org/drawingml/2006/main" prst="rect">
-            <a:avLst/>
-          </a:prstGeom>
-        </p:spPr>
-      </p:pic>
-      <p:sp>
-        <p:nvSpPr>
-          <p:cNvPr id="3" name="cover-paper-scrim"/>
+      <p:sp>
+        <p:nvSpPr>
+          <p:cNvPr id="2" name="cover-paper-scrim"/>
           <p:cNvSpPr/>
           <p:nvPr/>
         </p:nvSpPr>
@@ -785,7 +766,7 @@
       </p:sp>
       <p:sp>
         <p:nvSpPr>
-          <p:cNvPr id="4" name="fixed-rail"/>
+          <p:cNvPr id="3" name="fixed-rail"/>
           <p:cNvSpPr/>
           <p:nvPr/>
         </p:nvSpPr>
@@ -821,7 +802,7 @@
       </p:sp>
       <p:sp>
         <p:nvSpPr>
-          <p:cNvPr id="5" name="fixed-nav-0"/>
+          <p:cNvPr id="4" name="fixed-nav-0"/>
           <p:cNvSpPr/>
           <p:nvPr/>
         </p:nvSpPr>
@@ -857,7 +838,7 @@
       </p:sp>
       <p:sp>
         <p:nvSpPr>
-          <p:cNvPr id="6" name="fixed-nav-label-0"/>
+          <p:cNvPr id="5" name="fixed-nav-label-0"/>
           <p:cNvSpPr txBox="1"/>
           <p:nvPr/>
         </p:nvSpPr>
@@ -895,7 +876,7 @@
       </p:sp>
       <p:sp>
         <p:nvSpPr>
-          <p:cNvPr id="7" name="fixed-nav-1"/>
+          <p:cNvPr id="6" name="fixed-nav-1"/>
           <p:cNvSpPr/>
           <p:nvPr/>
         </p:nvSpPr>
@@ -931,7 +912,7 @@
       </p:sp>
       <p:sp>
         <p:nvSpPr>
-          <p:cNvPr id="8" name="fixed-nav-label-1"/>
+          <p:cNvPr id="7" name="fixed-nav-label-1"/>
           <p:cNvSpPr txBox="1"/>
           <p:nvPr/>
         </p:nvSpPr>
@@ -969,7 +950,7 @@
       </p:sp>
       <p:sp>
         <p:nvSpPr>
-          <p:cNvPr id="9" name="fixed-nav-2"/>
+          <p:cNvPr id="8" name="fixed-nav-2"/>
           <p:cNvSpPr/>
           <p:nvPr/>
         </p:nvSpPr>
@@ -1005,7 +986,7 @@
       </p:sp>
       <p:sp>
         <p:nvSpPr>
-          <p:cNvPr id="10" name="fixed-nav-label-2"/>
+          <p:cNvPr id="9" name="fixed-nav-label-2"/>
           <p:cNvSpPr txBox="1"/>
           <p:nvPr/>
         </p:nvSpPr>
@@ -1043,7 +1024,7 @@
       </p:sp>
       <p:sp>
         <p:nvSpPr>
-          <p:cNvPr id="11" name="fixed-nav-3"/>
+          <p:cNvPr id="10" name="fixed-nav-3"/>
           <p:cNvSpPr/>
           <p:nvPr/>
         </p:nvSpPr>
@@ -1079,7 +1060,7 @@
       </p:sp>
       <p:sp>
         <p:nvSpPr>
-          <p:cNvPr id="12" name="fixed-nav-label-3"/>
+          <p:cNvPr id="11" name="fixed-nav-label-3"/>
           <p:cNvSpPr txBox="1"/>
           <p:nvPr/>
         </p:nvSpPr>
@@ -1117,7 +1098,7 @@
       </p:sp>
       <p:sp>
         <p:nvSpPr>
-          <p:cNvPr id="13" name="fixed-nav-4"/>
+          <p:cNvPr id="12" name="fixed-nav-4"/>
           <p:cNvSpPr/>
           <p:nvPr/>
         </p:nvSpPr>
@@ -1153,7 +1134,7 @@
       </p:sp>
       <p:sp>
         <p:nvSpPr>
-          <p:cNvPr id="14" name="fixed-nav-label-4"/>
+          <p:cNvPr id="13" name="fixed-nav-label-4"/>
           <p:cNvSpPr txBox="1"/>
           <p:nvPr/>
         </p:nvSpPr>
@@ -1191,7 +1172,7 @@
       </p:sp>
       <p:sp>
         <p:nvSpPr>
-          <p:cNvPr id="15" name="top-rule"/>
+          <p:cNvPr id="14" name="top-rule"/>
           <p:cNvSpPr/>
           <p:nvPr/>
         </p:nvSpPr>
@@ -1225,7 +1206,7 @@
       </p:sp>
       <p:sp>
         <p:nvSpPr>
-          <p:cNvPr id="16" name="eyebrow"/>
+          <p:cNvPr id="15" name="eyebrow"/>
           <p:cNvSpPr txBox="1"/>
           <p:nvPr/>
         </p:nvSpPr>
@@ -1262,7 +1243,7 @@
       </p:sp>
       <p:sp>
         <p:nvSpPr>
-          <p:cNvPr id="17" name="cover-title"/>
+          <p:cNvPr id="16" name="cover-title"/>
           <p:cNvSpPr txBox="1"/>
           <p:nvPr/>
         </p:nvSpPr>
@@ -1299,7 +1280,7 @@
       </p:sp>
       <p:sp>
         <p:nvSpPr>
-          <p:cNvPr id="18" name="cover-subtitle"/>
+          <p:cNvPr id="17" name="cover-subtitle"/>
           <p:cNvSpPr txBox="1"/>
           <p:nvPr/>
         </p:nvSpPr>
@@ -1336,7 +1317,7 @@
       </p:sp>
       <p:sp>
         <p:nvSpPr>
-          <p:cNvPr id="19" name="cover-rule"/>
+          <p:cNvPr id="18" name="cover-rule"/>
           <p:cNvSpPr/>
           <p:nvPr/>
         </p:nvSpPr>
@@ -1370,7 +1351,7 @@
       </p:sp>
       <p:sp>
         <p:nvSpPr>
-          <p:cNvPr id="20" name="cover-basis"/>
+          <p:cNvPr id="19" name="cover-basis"/>
           <p:cNvSpPr txBox="1"/>
           <p:nvPr/>
         </p:nvSpPr>
@@ -1407,7 +1388,7 @@
       </p:sp>
       <p:sp>
         <p:nvSpPr>
-          <p:cNvPr id="21" name="cover-thesis"/>
+          <p:cNvPr id="20" name="cover-thesis"/>
           <p:cNvSpPr txBox="1"/>
           <p:nvPr/>
         </p:nvSpPr>
@@ -1444,7 +1425,7 @@
       </p:sp>
       <p:sp>
         <p:nvSpPr>
-          <p:cNvPr id="22" name="cover-source"/>
+          <p:cNvPr id="21" name="cover-source"/>
           <p:cNvSpPr txBox="1"/>
           <p:nvPr/>
         </p:nvSpPr>
@@ -1481,7 +1462,7 @@
       </p:sp>
       <p:sp>
         <p:nvSpPr>
-          <p:cNvPr id="23" name="page-number"/>
+          <p:cNvPr id="22" name="page-number"/>
           <p:cNvSpPr txBox="1"/>
           <p:nvPr/>
         </p:nvSpPr>
@@ -1519,7 +1500,7 @@
       </p:sp>
       <p:sp>
         <p:nvSpPr>
-          <p:cNvPr id="24" name="anchor-field"/>
+          <p:cNvPr id="23" name="anchor-field"/>
           <p:cNvSpPr/>
           <p:nvPr/>
         </p:nvSpPr>
@@ -1555,7 +1536,7 @@
       </p:sp>
       <p:sp>
         <p:nvSpPr>
-          <p:cNvPr id="25" name="anchor-grid-0-0"/>
+          <p:cNvPr id="24" name="anchor-grid-0-0"/>
           <p:cNvSpPr/>
           <p:nvPr/>
         </p:nvSpPr>
@@ -1591,7 +1572,7 @@
       </p:sp>
       <p:sp>
         <p:nvSpPr>
-          <p:cNvPr id="26" name="anchor-grid-0-1"/>
+          <p:cNvPr id="25" name="anchor-grid-0-1"/>
           <p:cNvSpPr/>
           <p:nvPr/>
         </p:nvSpPr>
@@ -1627,7 +1608,7 @@
       </p:sp>
       <p:sp>
         <p:nvSpPr>
-          <p:cNvPr id="27" name="anchor-grid-0-2"/>
+          <p:cNvPr id="26" name="anchor-grid-0-2"/>
           <p:cNvSpPr/>
           <p:nvPr/>
         </p:nvSpPr>
@@ -1663,7 +1644,7 @@
       </p:sp>
       <p:sp>
         <p:nvSpPr>
-          <p:cNvPr id="28" name="anchor-grid-1-0"/>
+          <p:cNvPr id="27" name="anchor-grid-1-0"/>
           <p:cNvSpPr/>
           <p:nvPr/>
         </p:nvSpPr>
@@ -1699,7 +1680,7 @@
       </p:sp>
       <p:sp>
         <p:nvSpPr>
-          <p:cNvPr id="29" name="anchor-grid-1-1"/>
+          <p:cNvPr id="28" name="anchor-grid-1-1"/>
           <p:cNvSpPr/>
           <p:nvPr/>
         </p:nvSpPr>
@@ -1735,7 +1716,7 @@
       </p:sp>
       <p:sp>
         <p:nvSpPr>
-          <p:cNvPr id="30" name="anchor-grid-1-2"/>
+          <p:cNvPr id="29" name="anchor-grid-1-2"/>
           <p:cNvSpPr/>
           <p:nvPr/>
         </p:nvSpPr>
@@ -1771,7 +1752,7 @@
       </p:sp>
       <p:sp>
         <p:nvSpPr>
-          <p:cNvPr id="31" name="anchor-grid-2-0"/>
+          <p:cNvPr id="30" name="anchor-grid-2-0"/>
           <p:cNvSpPr/>
           <p:nvPr/>
         </p:nvSpPr>
@@ -1807,7 +1788,7 @@
       </p:sp>
       <p:sp>
         <p:nvSpPr>
-          <p:cNvPr id="32" name="anchor-grid-2-1"/>
+          <p:cNvPr id="31" name="anchor-grid-2-1"/>
           <p:cNvSpPr/>
           <p:nvPr/>
         </p:nvSpPr>
@@ -1843,7 +1824,7 @@
       </p:sp>
       <p:sp>
         <p:nvSpPr>
-          <p:cNvPr id="33" name="anchor-grid-2-2"/>
+          <p:cNvPr id="32" name="anchor-grid-2-2"/>
           <p:cNvSpPr/>
           <p:nvPr/>
         </p:nvSpPr>
@@ -1879,7 +1860,7 @@
       </p:sp>
       <p:sp>
         <p:nvSpPr>
-          <p:cNvPr id="34" name="anchor-axis"/>
+          <p:cNvPr id="33" name="anchor-axis"/>
           <p:cNvSpPr/>
           <p:nvPr/>
         </p:nvSpPr>
@@ -3770,7 +3751,7 @@
         </p:xfrm>
         <a:graphic xmlns:a="http://schemas.openxmlformats.org/drawingml/2006/main">
           <a:graphicData uri="http://schemas.openxmlformats.org/drawingml/2006/chart">
-            <c:chart xmlns:r="http://schemas.openxmlformats.org/officeDocument/2006/relationships" xmlns:c="http://schemas.openxmlformats.org/drawingml/2006/chart" r:id="Re3a6d326d7c546e5"/>
+            <c:chart xmlns:r="http://schemas.openxmlformats.org/officeDocument/2006/relationships" xmlns:c="http://schemas.openxmlformats.org/drawingml/2006/chart" r:id="R48a10dd448c544f3"/>
           </a:graphicData>
         </a:graphic>
       </p:graphicFrame>
@@ -3788,7 +3769,7 @@
         </p:xfrm>
         <a:graphic xmlns:a="http://schemas.openxmlformats.org/drawingml/2006/main">
           <a:graphicData uri="http://schemas.openxmlformats.org/drawingml/2006/chart">
-            <c:chart xmlns:r="http://schemas.openxmlformats.org/officeDocument/2006/relationships" xmlns:c="http://schemas.openxmlformats.org/drawingml/2006/chart" r:id="Rd5540448384c4d98"/>
+            <c:chart xmlns:r="http://schemas.openxmlformats.org/officeDocument/2006/relationships" xmlns:c="http://schemas.openxmlformats.org/drawingml/2006/chart" r:id="Re7f05caa676a407a"/>
           </a:graphicData>
         </a:graphic>
       </p:graphicFrame>
@@ -6086,7 +6067,7 @@
         </p:xfrm>
         <a:graphic xmlns:a="http://schemas.openxmlformats.org/drawingml/2006/main">
           <a:graphicData uri="http://schemas.openxmlformats.org/drawingml/2006/chart">
-            <c:chart xmlns:r="http://schemas.openxmlformats.org/officeDocument/2006/relationships" xmlns:c="http://schemas.openxmlformats.org/drawingml/2006/chart" r:id="R5495d9c7307b462b"/>
+            <c:chart xmlns:r="http://schemas.openxmlformats.org/officeDocument/2006/relationships" xmlns:c="http://schemas.openxmlformats.org/drawingml/2006/chart" r:id="Rd45c05f779f842ed"/>
           </a:graphicData>
         </a:graphic>
       </p:graphicFrame>
@@ -6104,7 +6085,7 @@
         </p:xfrm>
         <a:graphic xmlns:a="http://schemas.openxmlformats.org/drawingml/2006/main">
           <a:graphicData uri="http://schemas.openxmlformats.org/drawingml/2006/chart">
-            <c:chart xmlns:r="http://schemas.openxmlformats.org/officeDocument/2006/relationships" xmlns:c="http://schemas.openxmlformats.org/drawingml/2006/chart" r:id="Rc2d2191c9b8b48cd"/>
+            <c:chart xmlns:r="http://schemas.openxmlformats.org/officeDocument/2006/relationships" xmlns:c="http://schemas.openxmlformats.org/drawingml/2006/chart" r:id="Rf086b4177c514f84"/>
           </a:graphicData>
         </a:graphic>
       </p:graphicFrame>

--- a/skills/presentation-template-library/skills/artifact-template-blue-flame-operations/assets/reference.pptx
+++ b/skills/presentation-template-library/skills/artifact-template-blue-flame-operations/assets/reference.pptx
@@ -194,518 +194,13 @@
 </a:theme>
 </file>
 
-<file path=ppt/slides/charts/chart1.xml><?xml version="1.0" encoding="utf-8"?>
-<c:chartSpace xmlns:c="http://schemas.openxmlformats.org/drawingml/2006/chart" xmlns:a="http://schemas.openxmlformats.org/drawingml/2006/main">
-  <c:chart>
-    <c:title>
-      <c:tx>
-        <c:rich>
-          <a:bodyPr/>
-          <a:lstStyle/>
-          <a:p>
-            <a:r>
-              <a:t>Primary signal · observed versus reference</a:t>
-            </a:r>
-          </a:p>
-        </c:rich>
-      </c:tx>
-      <c:layout/>
-    </c:title>
-    <c:plotArea>
-      <c:layout/>
-      <c:barChart>
-        <c:barDir val="col"/>
-        <c:grouping val="clustered"/>
-        <c:ser>
-          <c:idx val="0"/>
-          <c:order val="0"/>
-          <c:tx>
-            <c:v>Observed</c:v>
-          </c:tx>
-          <c:spPr>
-            <a:solidFill>
-              <a:srgbClr val="20BBD8"/>
-            </a:solidFill>
-          </c:spPr>
-          <c:cat>
-            <c:strLit>
-              <c:ptCount val="6"/>
-              <c:pt idx="0">
-                <c:v>Q1</c:v>
-              </c:pt>
-              <c:pt idx="1">
-                <c:v>Q2</c:v>
-              </c:pt>
-              <c:pt idx="2">
-                <c:v>Q3</c:v>
-              </c:pt>
-              <c:pt idx="3">
-                <c:v>Q4</c:v>
-              </c:pt>
-              <c:pt idx="4">
-                <c:v>Q5</c:v>
-              </c:pt>
-              <c:pt idx="5">
-                <c:v>Q6</c:v>
-              </c:pt>
-            </c:strLit>
-          </c:cat>
-          <c:val>
-            <c:numLit>
-              <c:formatCode>General</c:formatCode>
-              <c:ptCount val="6"/>
-              <c:pt idx="0">
-                <c:v>38</c:v>
-              </c:pt>
-              <c:pt idx="1">
-                <c:v>46</c:v>
-              </c:pt>
-              <c:pt idx="2">
-                <c:v>43</c:v>
-              </c:pt>
-              <c:pt idx="3">
-                <c:v>58</c:v>
-              </c:pt>
-              <c:pt idx="4">
-                <c:v>68</c:v>
-              </c:pt>
-              <c:pt idx="5">
-                <c:v>74</c:v>
-              </c:pt>
-            </c:numLit>
-          </c:val>
-        </c:ser>
-        <c:ser>
-          <c:idx val="1"/>
-          <c:order val="1"/>
-          <c:tx>
-            <c:v>Reference</c:v>
-          </c:tx>
-          <c:spPr>
-            <a:solidFill>
-              <a:srgbClr val="787B7F"/>
-            </a:solidFill>
-          </c:spPr>
-          <c:cat>
-            <c:strLit>
-              <c:ptCount val="6"/>
-              <c:pt idx="0">
-                <c:v>Q1</c:v>
-              </c:pt>
-              <c:pt idx="1">
-                <c:v>Q2</c:v>
-              </c:pt>
-              <c:pt idx="2">
-                <c:v>Q3</c:v>
-              </c:pt>
-              <c:pt idx="3">
-                <c:v>Q4</c:v>
-              </c:pt>
-              <c:pt idx="4">
-                <c:v>Q5</c:v>
-              </c:pt>
-              <c:pt idx="5">
-                <c:v>Q6</c:v>
-              </c:pt>
-            </c:strLit>
-          </c:cat>
-          <c:val>
-            <c:numLit>
-              <c:formatCode>General</c:formatCode>
-              <c:ptCount val="6"/>
-              <c:pt idx="0">
-                <c:v>34</c:v>
-              </c:pt>
-              <c:pt idx="1">
-                <c:v>39</c:v>
-              </c:pt>
-              <c:pt idx="2">
-                <c:v>41</c:v>
-              </c:pt>
-              <c:pt idx="3">
-                <c:v>45</c:v>
-              </c:pt>
-              <c:pt idx="4">
-                <c:v>49</c:v>
-              </c:pt>
-              <c:pt idx="5">
-                <c:v>52</c:v>
-              </c:pt>
-            </c:numLit>
-          </c:val>
-        </c:ser>
-        <c:axId val="1"/>
-        <c:axId val="2"/>
-      </c:barChart>
-      <c:catAx>
-        <c:axId val="1"/>
-        <c:scaling>
-          <c:orientation val="minMax"/>
-        </c:scaling>
-        <c:axPos val="b"/>
-        <c:crossAx val="2"/>
-      </c:catAx>
-      <c:valAx>
-        <c:axId val="2"/>
-        <c:scaling>
-          <c:orientation val="minMax"/>
-        </c:scaling>
-        <c:axPos val="l"/>
-        <c:crossAx val="1"/>
-      </c:valAx>
-    </c:plotArea>
-    <c:legend>
-      <c:legendPos val="r"/>
-      <c:layout/>
-    </c:legend>
-    <c:plotVisOnly val="1"/>
-  </c:chart>
-</c:chartSpace>
-</file>
-
-<file path=ppt/slides/charts/chart2.xml><?xml version="1.0" encoding="utf-8"?>
-<c:chartSpace xmlns:c="http://schemas.openxmlformats.org/drawingml/2006/chart" xmlns:a="http://schemas.openxmlformats.org/drawingml/2006/main">
-  <c:chart>
-    <c:title>
-      <c:tx>
-        <c:rich>
-          <a:bodyPr/>
-          <a:lstStyle/>
-          <a:p>
-            <a:r>
-              <a:t>Driver trend</a:t>
-            </a:r>
-          </a:p>
-        </c:rich>
-      </c:tx>
-      <c:layout/>
-    </c:title>
-    <c:plotArea>
-      <c:layout/>
-      <c:lineChart>
-        <c:grouping val="standard"/>
-        <c:ser>
-          <c:idx val="0"/>
-          <c:order val="0"/>
-          <c:tx>
-            <c:v>Driver</c:v>
-          </c:tx>
-          <c:spPr>
-            <a:solidFill>
-              <a:srgbClr val="87DCEB"/>
-            </a:solidFill>
-            <a:ln w="38100">
-              <a:solidFill>
-                <a:srgbClr val="87DCEB"/>
-              </a:solidFill>
-              <a:prstDash val="solid"/>
-            </a:ln>
-          </c:spPr>
-          <c:marker>
-            <c:symbol val="circle"/>
-            <c:size val="6"/>
-          </c:marker>
-          <c:cat>
-            <c:strLit>
-              <c:ptCount val="6"/>
-              <c:pt idx="0">
-                <c:v>Q1</c:v>
-              </c:pt>
-              <c:pt idx="1">
-                <c:v>Q2</c:v>
-              </c:pt>
-              <c:pt idx="2">
-                <c:v>Q3</c:v>
-              </c:pt>
-              <c:pt idx="3">
-                <c:v>Q4</c:v>
-              </c:pt>
-              <c:pt idx="4">
-                <c:v>Q5</c:v>
-              </c:pt>
-              <c:pt idx="5">
-                <c:v>Q6</c:v>
-              </c:pt>
-            </c:strLit>
-          </c:cat>
-          <c:val>
-            <c:numLit>
-              <c:formatCode>General</c:formatCode>
-              <c:ptCount val="6"/>
-              <c:pt idx="0">
-                <c:v>22</c:v>
-              </c:pt>
-              <c:pt idx="1">
-                <c:v>28</c:v>
-              </c:pt>
-              <c:pt idx="2">
-                <c:v>34</c:v>
-              </c:pt>
-              <c:pt idx="3">
-                <c:v>39</c:v>
-              </c:pt>
-              <c:pt idx="4">
-                <c:v>45</c:v>
-              </c:pt>
-              <c:pt idx="5">
-                <c:v>51</c:v>
-              </c:pt>
-            </c:numLit>
-          </c:val>
-        </c:ser>
-        <c:axId val="1"/>
-        <c:axId val="2"/>
-      </c:lineChart>
-      <c:catAx>
-        <c:axId val="1"/>
-        <c:scaling>
-          <c:orientation val="minMax"/>
-        </c:scaling>
-        <c:axPos val="b"/>
-        <c:crossAx val="2"/>
-      </c:catAx>
-      <c:valAx>
-        <c:axId val="2"/>
-        <c:scaling>
-          <c:orientation val="minMax"/>
-        </c:scaling>
-        <c:axPos val="l"/>
-        <c:crossAx val="1"/>
-      </c:valAx>
-    </c:plotArea>
-    <c:plotVisOnly val="1"/>
-  </c:chart>
-</c:chartSpace>
-</file>
-
-<file path=ppt/slides/charts/chart3.xml><?xml version="1.0" encoding="utf-8"?>
-<c:chartSpace xmlns:c="http://schemas.openxmlformats.org/drawingml/2006/chart" xmlns:a="http://schemas.openxmlformats.org/drawingml/2006/main">
-  <c:chart>
-    <c:title>
-      <c:tx>
-        <c:rich>
-          <a:bodyPr/>
-          <a:lstStyle/>
-          <a:p>
-            <a:r>
-              <a:t>Observed signal</a:t>
-            </a:r>
-          </a:p>
-        </c:rich>
-      </c:tx>
-      <c:layout/>
-    </c:title>
-    <c:plotArea>
-      <c:layout/>
-      <c:barChart>
-        <c:barDir val="col"/>
-        <c:grouping val="clustered"/>
-        <c:ser>
-          <c:idx val="0"/>
-          <c:order val="0"/>
-          <c:tx>
-            <c:v>Observed</c:v>
-          </c:tx>
-          <c:spPr>
-            <a:solidFill>
-              <a:srgbClr val="20BBD8"/>
-            </a:solidFill>
-          </c:spPr>
-          <c:cat>
-            <c:strLit>
-              <c:ptCount val="6"/>
-              <c:pt idx="0">
-                <c:v>A</c:v>
-              </c:pt>
-              <c:pt idx="1">
-                <c:v>B</c:v>
-              </c:pt>
-              <c:pt idx="2">
-                <c:v>C</c:v>
-              </c:pt>
-              <c:pt idx="3">
-                <c:v>D</c:v>
-              </c:pt>
-              <c:pt idx="4">
-                <c:v>E</c:v>
-              </c:pt>
-              <c:pt idx="5">
-                <c:v>F</c:v>
-              </c:pt>
-            </c:strLit>
-          </c:cat>
-          <c:val>
-            <c:numLit>
-              <c:formatCode>General</c:formatCode>
-              <c:ptCount val="6"/>
-              <c:pt idx="0">
-                <c:v>38</c:v>
-              </c:pt>
-              <c:pt idx="1">
-                <c:v>46</c:v>
-              </c:pt>
-              <c:pt idx="2">
-                <c:v>43</c:v>
-              </c:pt>
-              <c:pt idx="3">
-                <c:v>58</c:v>
-              </c:pt>
-              <c:pt idx="4">
-                <c:v>68</c:v>
-              </c:pt>
-              <c:pt idx="5">
-                <c:v>74</c:v>
-              </c:pt>
-            </c:numLit>
-          </c:val>
-        </c:ser>
-        <c:axId val="1"/>
-        <c:axId val="2"/>
-      </c:barChart>
-      <c:catAx>
-        <c:axId val="1"/>
-        <c:scaling>
-          <c:orientation val="minMax"/>
-        </c:scaling>
-        <c:axPos val="b"/>
-        <c:crossAx val="2"/>
-      </c:catAx>
-      <c:valAx>
-        <c:axId val="2"/>
-        <c:scaling>
-          <c:orientation val="minMax"/>
-        </c:scaling>
-        <c:axPos val="l"/>
-        <c:crossAx val="1"/>
-      </c:valAx>
-    </c:plotArea>
-    <c:plotVisOnly val="1"/>
-  </c:chart>
-</c:chartSpace>
-</file>
-
-<file path=ppt/slides/charts/chart4.xml><?xml version="1.0" encoding="utf-8"?>
-<c:chartSpace xmlns:c="http://schemas.openxmlformats.org/drawingml/2006/chart" xmlns:a="http://schemas.openxmlformats.org/drawingml/2006/main">
-  <c:chart>
-    <c:title>
-      <c:tx>
-        <c:rich>
-          <a:bodyPr/>
-          <a:lstStyle/>
-          <a:p>
-            <a:r>
-              <a:t>Context</a:t>
-            </a:r>
-          </a:p>
-        </c:rich>
-      </c:tx>
-      <c:layout/>
-    </c:title>
-    <c:plotArea>
-      <c:layout/>
-      <c:lineChart>
-        <c:grouping val="standard"/>
-        <c:ser>
-          <c:idx val="0"/>
-          <c:order val="0"/>
-          <c:tx>
-            <c:v>Context</c:v>
-          </c:tx>
-          <c:spPr>
-            <a:solidFill>
-              <a:srgbClr val="87DCEB"/>
-            </a:solidFill>
-            <a:ln w="38100">
-              <a:solidFill>
-                <a:srgbClr val="87DCEB"/>
-              </a:solidFill>
-              <a:prstDash val="solid"/>
-            </a:ln>
-          </c:spPr>
-          <c:marker>
-            <c:symbol val="circle"/>
-            <c:size val="6"/>
-          </c:marker>
-          <c:cat>
-            <c:strLit>
-              <c:ptCount val="6"/>
-              <c:pt idx="0">
-                <c:v>A</c:v>
-              </c:pt>
-              <c:pt idx="1">
-                <c:v>B</c:v>
-              </c:pt>
-              <c:pt idx="2">
-                <c:v>C</c:v>
-              </c:pt>
-              <c:pt idx="3">
-                <c:v>D</c:v>
-              </c:pt>
-              <c:pt idx="4">
-                <c:v>E</c:v>
-              </c:pt>
-              <c:pt idx="5">
-                <c:v>F</c:v>
-              </c:pt>
-            </c:strLit>
-          </c:cat>
-          <c:val>
-            <c:numLit>
-              <c:formatCode>General</c:formatCode>
-              <c:ptCount val="6"/>
-              <c:pt idx="0">
-                <c:v>34</c:v>
-              </c:pt>
-              <c:pt idx="1">
-                <c:v>39</c:v>
-              </c:pt>
-              <c:pt idx="2">
-                <c:v>41</c:v>
-              </c:pt>
-              <c:pt idx="3">
-                <c:v>45</c:v>
-              </c:pt>
-              <c:pt idx="4">
-                <c:v>49</c:v>
-              </c:pt>
-              <c:pt idx="5">
-                <c:v>52</c:v>
-              </c:pt>
-            </c:numLit>
-          </c:val>
-        </c:ser>
-        <c:axId val="1"/>
-        <c:axId val="2"/>
-      </c:lineChart>
-      <c:catAx>
-        <c:axId val="1"/>
-        <c:scaling>
-          <c:orientation val="minMax"/>
-        </c:scaling>
-        <c:axPos val="b"/>
-        <c:crossAx val="2"/>
-      </c:catAx>
-      <c:valAx>
-        <c:axId val="2"/>
-        <c:scaling>
-          <c:orientation val="minMax"/>
-        </c:scaling>
-        <c:axPos val="l"/>
-        <c:crossAx val="1"/>
-      </c:valAx>
-    </c:plotArea>
-    <c:plotVisOnly val="1"/>
-  </c:chart>
-</c:chartSpace>
-</file>
-
 <file path=ppt/slides/slide1.xml><?xml version="1.0" encoding="utf-8"?>
 <p:sld xmlns:p="http://schemas.openxmlformats.org/presentationml/2006/main">
   <p:cSld name="Opening claim">
     <p:bg>
       <p:bgPr>
         <a:blipFill xmlns:a="http://schemas.openxmlformats.org/drawingml/2006/main">
-          <a:blip xmlns:r="http://schemas.openxmlformats.org/officeDocument/2006/relationships" r:embed="rIdOfficeKitImage59ee3aa5202fd02f_1"/>
+          <a:blip xmlns:r="http://schemas.openxmlformats.org/officeDocument/2006/relationships" r:embed="rIdOfficeKitImageb5a7d66fe0ba8bb7_1"/>
           <a:stretch>
             <a:fillRect/>
           </a:stretch>
@@ -3737,52 +3232,53 @@
           </a:p>
         </p:txBody>
       </p:sp>
-      <p:graphicFrame>
-        <p:nvGraphicFramePr>
-          <p:cNvPr id="19" name="dense-primary-chart"/>
-          <p:cNvGraphicFramePr>
-            <a:graphicFrameLocks xmlns:a="http://schemas.openxmlformats.org/drawingml/2006/main" noGrp="1"/>
-          </p:cNvGraphicFramePr>
-          <p:nvPr/>
-        </p:nvGraphicFramePr>
-        <p:xfrm>
-          <a:off xmlns:a="http://schemas.openxmlformats.org/drawingml/2006/main" x="990600" y="3048000"/>
-          <a:ext xmlns:a="http://schemas.openxmlformats.org/drawingml/2006/main" cx="6286500" cy="2952750"/>
-        </p:xfrm>
-        <a:graphic xmlns:a="http://schemas.openxmlformats.org/drawingml/2006/main">
-          <a:graphicData uri="http://schemas.openxmlformats.org/drawingml/2006/chart">
-            <c:chart xmlns:r="http://schemas.openxmlformats.org/officeDocument/2006/relationships" xmlns:c="http://schemas.openxmlformats.org/drawingml/2006/chart" r:id="R48a10dd448c544f3"/>
-          </a:graphicData>
-        </a:graphic>
-      </p:graphicFrame>
-      <p:graphicFrame>
-        <p:nvGraphicFramePr>
-          <p:cNvPr id="20" name="dense-secondary-chart"/>
-          <p:cNvGraphicFramePr>
-            <a:graphicFrameLocks xmlns:a="http://schemas.openxmlformats.org/drawingml/2006/main" noGrp="1"/>
-          </p:cNvGraphicFramePr>
-          <p:nvPr/>
-        </p:nvGraphicFramePr>
-        <p:xfrm>
-          <a:off xmlns:a="http://schemas.openxmlformats.org/drawingml/2006/main" x="7658100" y="3048000"/>
-          <a:ext xmlns:a="http://schemas.openxmlformats.org/drawingml/2006/main" cx="3143250" cy="2952750"/>
-        </p:xfrm>
-        <a:graphic xmlns:a="http://schemas.openxmlformats.org/drawingml/2006/main">
-          <a:graphicData uri="http://schemas.openxmlformats.org/drawingml/2006/chart">
-            <c:chart xmlns:r="http://schemas.openxmlformats.org/officeDocument/2006/relationships" xmlns:c="http://schemas.openxmlformats.org/drawingml/2006/chart" r:id="Re7f05caa676a407a"/>
-          </a:graphicData>
-        </a:graphic>
-      </p:graphicFrame>
-      <p:sp>
-        <p:nvSpPr>
-          <p:cNvPr id="21" name="dense-read-rule"/>
-          <p:cNvSpPr/>
-          <p:nvPr/>
-        </p:nvSpPr>
-        <p:spPr>
-          <a:xfrm xmlns:a="http://schemas.openxmlformats.org/drawingml/2006/main">
-            <a:off x="11315700" y="3314700"/>
-            <a:ext cx="2686050" cy="0"/>
+      <p:sp>
+        <p:nvSpPr>
+          <p:cNvPr id="19" name="timeline-label"/>
+          <p:cNvSpPr txBox="1"/>
+          <p:nvPr/>
+        </p:nvSpPr>
+        <p:spPr>
+          <a:xfrm xmlns:a="http://schemas.openxmlformats.org/drawingml/2006/main">
+            <a:off x="1066800" y="3238500"/>
+            <a:ext cx="4000500" cy="228600"/>
+          </a:xfrm>
+          <a:prstGeom xmlns:a="http://schemas.openxmlformats.org/drawingml/2006/main" prst="rect">
+            <a:avLst/>
+          </a:prstGeom>
+          <a:noFill xmlns:a="http://schemas.openxmlformats.org/drawingml/2006/main"/>
+          <a:ln xmlns:a="http://schemas.openxmlformats.org/drawingml/2006/main" w="0">
+            <a:noFill/>
+          </a:ln>
+        </p:spPr>
+        <p:txBody>
+          <a:bodyPr xmlns:a="http://schemas.openxmlformats.org/drawingml/2006/main" wrap="square" lIns="0" tIns="0" rIns="0" bIns="0" anchor="t"/>
+          <a:lstStyle xmlns:a="http://schemas.openxmlformats.org/drawingml/2006/main"/>
+          <a:p xmlns:a="http://schemas.openxmlformats.org/drawingml/2006/main">
+            <a:r>
+              <a:rPr lang="en-US" sz="1125" b="1">
+                <a:solidFill>
+                  <a:srgbClr val="20BBD8"/>
+                </a:solidFill>
+                <a:latin typeface="Inter"/>
+                <a:ea typeface="Inter"/>
+              </a:rPr>
+              <a:t>EVOLUTION / TRANSITION</a:t>
+            </a:r>
+            <a:endParaRPr lang="en-US"/>
+          </a:p>
+        </p:txBody>
+      </p:sp>
+      <p:sp>
+        <p:nvSpPr>
+          <p:cNvPr id="20" name="timeline-axis"/>
+          <p:cNvSpPr/>
+          <p:nvPr/>
+        </p:nvSpPr>
+        <p:spPr>
+          <a:xfrm xmlns:a="http://schemas.openxmlformats.org/drawingml/2006/main">
+            <a:off x="1219200" y="4762500"/>
+            <a:ext cx="10287000" cy="0"/>
           </a:xfrm>
           <a:prstGeom xmlns:a="http://schemas.openxmlformats.org/drawingml/2006/main" prst="line">
             <a:avLst/>
@@ -3790,6 +3286,642 @@
           <a:noFill xmlns:a="http://schemas.openxmlformats.org/drawingml/2006/main"/>
           <a:ln xmlns:a="http://schemas.openxmlformats.org/drawingml/2006/main" w="38100">
             <a:solidFill>
+              <a:srgbClr val="787B7F"/>
+            </a:solidFill>
+            <a:prstDash val="solid"/>
+          </a:ln>
+        </p:spPr>
+        <p:txBody>
+          <a:bodyPr xmlns:a="http://schemas.openxmlformats.org/drawingml/2006/main" wrap="square" lIns="0" tIns="0" rIns="0" bIns="0" anchor="t"/>
+          <a:lstStyle xmlns:a="http://schemas.openxmlformats.org/drawingml/2006/main"/>
+          <a:p xmlns:a="http://schemas.openxmlformats.org/drawingml/2006/main">
+            <a:r>
+              <a:rPr lang="en-US"/>
+              <a:t/>
+            </a:r>
+            <a:endParaRPr lang="en-US"/>
+          </a:p>
+        </p:txBody>
+      </p:sp>
+      <p:sp>
+        <p:nvSpPr>
+          <p:cNvPr id="21" name="timeline-node-0"/>
+          <p:cNvSpPr/>
+          <p:nvPr/>
+        </p:nvSpPr>
+        <p:spPr>
+          <a:xfrm xmlns:a="http://schemas.openxmlformats.org/drawingml/2006/main">
+            <a:off x="1066800" y="4610100"/>
+            <a:ext cx="304800" cy="304800"/>
+          </a:xfrm>
+          <a:prstGeom xmlns:a="http://schemas.openxmlformats.org/drawingml/2006/main" prst="ellipse">
+            <a:avLst/>
+          </a:prstGeom>
+          <a:solidFill xmlns:a="http://schemas.openxmlformats.org/drawingml/2006/main">
+            <a:srgbClr val="070A10"/>
+          </a:solidFill>
+          <a:ln xmlns:a="http://schemas.openxmlformats.org/drawingml/2006/main" w="25400">
+            <a:solidFill>
+              <a:srgbClr val="F2F6F8"/>
+            </a:solidFill>
+            <a:prstDash val="solid"/>
+          </a:ln>
+        </p:spPr>
+        <p:txBody>
+          <a:bodyPr xmlns:a="http://schemas.openxmlformats.org/drawingml/2006/main" wrap="square" lIns="0" tIns="0" rIns="0" bIns="0" anchor="t"/>
+          <a:lstStyle xmlns:a="http://schemas.openxmlformats.org/drawingml/2006/main"/>
+          <a:p xmlns:a="http://schemas.openxmlformats.org/drawingml/2006/main">
+            <a:r>
+              <a:rPr lang="en-US"/>
+              <a:t/>
+            </a:r>
+            <a:endParaRPr lang="en-US"/>
+          </a:p>
+        </p:txBody>
+      </p:sp>
+      <p:sp>
+        <p:nvSpPr>
+          <p:cNvPr id="22" name="timeline-number-0"/>
+          <p:cNvSpPr txBox="1"/>
+          <p:nvPr/>
+        </p:nvSpPr>
+        <p:spPr>
+          <a:xfrm xmlns:a="http://schemas.openxmlformats.org/drawingml/2006/main">
+            <a:off x="952500" y="4076700"/>
+            <a:ext cx="533400" cy="190500"/>
+          </a:xfrm>
+          <a:prstGeom xmlns:a="http://schemas.openxmlformats.org/drawingml/2006/main" prst="rect">
+            <a:avLst/>
+          </a:prstGeom>
+          <a:noFill xmlns:a="http://schemas.openxmlformats.org/drawingml/2006/main"/>
+          <a:ln xmlns:a="http://schemas.openxmlformats.org/drawingml/2006/main" w="0">
+            <a:noFill/>
+          </a:ln>
+        </p:spPr>
+        <p:txBody>
+          <a:bodyPr xmlns:a="http://schemas.openxmlformats.org/drawingml/2006/main" wrap="square" lIns="0" tIns="0" rIns="0" bIns="0" anchor="t"/>
+          <a:lstStyle xmlns:a="http://schemas.openxmlformats.org/drawingml/2006/main"/>
+          <a:p xmlns:a="http://schemas.openxmlformats.org/drawingml/2006/main">
+            <a:pPr algn="ctr"/>
+            <a:r>
+              <a:rPr lang="en-US" sz="975" b="1">
+                <a:solidFill>
+                  <a:srgbClr val="20BBD8"/>
+                </a:solidFill>
+                <a:latin typeface="Inter"/>
+                <a:ea typeface="Inter"/>
+              </a:rPr>
+              <a:t>01</a:t>
+            </a:r>
+            <a:endParaRPr lang="en-US"/>
+          </a:p>
+        </p:txBody>
+      </p:sp>
+      <p:sp>
+        <p:nvSpPr>
+          <p:cNvPr id="23" name="timeline-label-0"/>
+          <p:cNvSpPr txBox="1"/>
+          <p:nvPr/>
+        </p:nvSpPr>
+        <p:spPr>
+          <a:xfrm xmlns:a="http://schemas.openxmlformats.org/drawingml/2006/main">
+            <a:off x="533400" y="5086350"/>
+            <a:ext cx="1371600" cy="228600"/>
+          </a:xfrm>
+          <a:prstGeom xmlns:a="http://schemas.openxmlformats.org/drawingml/2006/main" prst="rect">
+            <a:avLst/>
+          </a:prstGeom>
+          <a:noFill xmlns:a="http://schemas.openxmlformats.org/drawingml/2006/main"/>
+          <a:ln xmlns:a="http://schemas.openxmlformats.org/drawingml/2006/main" w="0">
+            <a:noFill/>
+          </a:ln>
+        </p:spPr>
+        <p:txBody>
+          <a:bodyPr xmlns:a="http://schemas.openxmlformats.org/drawingml/2006/main" wrap="square" lIns="0" tIns="0" rIns="0" bIns="0" anchor="t"/>
+          <a:lstStyle xmlns:a="http://schemas.openxmlformats.org/drawingml/2006/main"/>
+          <a:p xmlns:a="http://schemas.openxmlformats.org/drawingml/2006/main">
+            <a:pPr algn="ctr"/>
+            <a:r>
+              <a:rPr lang="en-US" sz="1350" b="1">
+                <a:solidFill>
+                  <a:srgbClr val="F2F6F8"/>
+                </a:solidFill>
+                <a:latin typeface="Inter"/>
+                <a:ea typeface="Inter"/>
+              </a:rPr>
+              <a:t>Frame</a:t>
+            </a:r>
+            <a:endParaRPr lang="en-US"/>
+          </a:p>
+        </p:txBody>
+      </p:sp>
+      <p:sp>
+        <p:nvSpPr>
+          <p:cNvPr id="24" name="timeline-text-0"/>
+          <p:cNvSpPr txBox="1"/>
+          <p:nvPr/>
+        </p:nvSpPr>
+        <p:spPr>
+          <a:xfrm xmlns:a="http://schemas.openxmlformats.org/drawingml/2006/main">
+            <a:off x="323850" y="5391150"/>
+            <a:ext cx="1790700" cy="361950"/>
+          </a:xfrm>
+          <a:prstGeom xmlns:a="http://schemas.openxmlformats.org/drawingml/2006/main" prst="rect">
+            <a:avLst/>
+          </a:prstGeom>
+          <a:noFill xmlns:a="http://schemas.openxmlformats.org/drawingml/2006/main"/>
+          <a:ln xmlns:a="http://schemas.openxmlformats.org/drawingml/2006/main" w="0">
+            <a:noFill/>
+          </a:ln>
+        </p:spPr>
+        <p:txBody>
+          <a:bodyPr xmlns:a="http://schemas.openxmlformats.org/drawingml/2006/main" wrap="square" lIns="0" tIns="0" rIns="0" bIns="0" anchor="t"/>
+          <a:lstStyle xmlns:a="http://schemas.openxmlformats.org/drawingml/2006/main"/>
+          <a:p xmlns:a="http://schemas.openxmlformats.org/drawingml/2006/main">
+            <a:pPr algn="ctr"/>
+            <a:r>
+              <a:rPr lang="en-US" sz="1050">
+                <a:solidFill>
+                  <a:srgbClr val="787B7F"/>
+                </a:solidFill>
+                <a:latin typeface="Inter"/>
+                <a:ea typeface="Inter"/>
+              </a:rPr>
+              <a:t>Name the question</a:t>
+            </a:r>
+            <a:endParaRPr lang="en-US"/>
+          </a:p>
+        </p:txBody>
+      </p:sp>
+      <p:sp>
+        <p:nvSpPr>
+          <p:cNvPr id="25" name="timeline-node-1"/>
+          <p:cNvSpPr/>
+          <p:nvPr/>
+        </p:nvSpPr>
+        <p:spPr>
+          <a:xfrm xmlns:a="http://schemas.openxmlformats.org/drawingml/2006/main">
+            <a:off x="3638550" y="4610100"/>
+            <a:ext cx="304800" cy="304800"/>
+          </a:xfrm>
+          <a:prstGeom xmlns:a="http://schemas.openxmlformats.org/drawingml/2006/main" prst="ellipse">
+            <a:avLst/>
+          </a:prstGeom>
+          <a:solidFill xmlns:a="http://schemas.openxmlformats.org/drawingml/2006/main">
+            <a:srgbClr val="070A10"/>
+          </a:solidFill>
+          <a:ln xmlns:a="http://schemas.openxmlformats.org/drawingml/2006/main" w="25400">
+            <a:solidFill>
+              <a:srgbClr val="F2F6F8"/>
+            </a:solidFill>
+            <a:prstDash val="solid"/>
+          </a:ln>
+        </p:spPr>
+        <p:txBody>
+          <a:bodyPr xmlns:a="http://schemas.openxmlformats.org/drawingml/2006/main" wrap="square" lIns="0" tIns="0" rIns="0" bIns="0" anchor="t"/>
+          <a:lstStyle xmlns:a="http://schemas.openxmlformats.org/drawingml/2006/main"/>
+          <a:p xmlns:a="http://schemas.openxmlformats.org/drawingml/2006/main">
+            <a:r>
+              <a:rPr lang="en-US"/>
+              <a:t/>
+            </a:r>
+            <a:endParaRPr lang="en-US"/>
+          </a:p>
+        </p:txBody>
+      </p:sp>
+      <p:sp>
+        <p:nvSpPr>
+          <p:cNvPr id="26" name="timeline-number-1"/>
+          <p:cNvSpPr txBox="1"/>
+          <p:nvPr/>
+        </p:nvSpPr>
+        <p:spPr>
+          <a:xfrm xmlns:a="http://schemas.openxmlformats.org/drawingml/2006/main">
+            <a:off x="3524250" y="4076700"/>
+            <a:ext cx="533400" cy="190500"/>
+          </a:xfrm>
+          <a:prstGeom xmlns:a="http://schemas.openxmlformats.org/drawingml/2006/main" prst="rect">
+            <a:avLst/>
+          </a:prstGeom>
+          <a:noFill xmlns:a="http://schemas.openxmlformats.org/drawingml/2006/main"/>
+          <a:ln xmlns:a="http://schemas.openxmlformats.org/drawingml/2006/main" w="0">
+            <a:noFill/>
+          </a:ln>
+        </p:spPr>
+        <p:txBody>
+          <a:bodyPr xmlns:a="http://schemas.openxmlformats.org/drawingml/2006/main" wrap="square" lIns="0" tIns="0" rIns="0" bIns="0" anchor="t"/>
+          <a:lstStyle xmlns:a="http://schemas.openxmlformats.org/drawingml/2006/main"/>
+          <a:p xmlns:a="http://schemas.openxmlformats.org/drawingml/2006/main">
+            <a:pPr algn="ctr"/>
+            <a:r>
+              <a:rPr lang="en-US" sz="975" b="1">
+                <a:solidFill>
+                  <a:srgbClr val="20BBD8"/>
+                </a:solidFill>
+                <a:latin typeface="Inter"/>
+                <a:ea typeface="Inter"/>
+              </a:rPr>
+              <a:t>02</a:t>
+            </a:r>
+            <a:endParaRPr lang="en-US"/>
+          </a:p>
+        </p:txBody>
+      </p:sp>
+      <p:sp>
+        <p:nvSpPr>
+          <p:cNvPr id="27" name="timeline-label-1"/>
+          <p:cNvSpPr txBox="1"/>
+          <p:nvPr/>
+        </p:nvSpPr>
+        <p:spPr>
+          <a:xfrm xmlns:a="http://schemas.openxmlformats.org/drawingml/2006/main">
+            <a:off x="3105150" y="5086350"/>
+            <a:ext cx="1371600" cy="228600"/>
+          </a:xfrm>
+          <a:prstGeom xmlns:a="http://schemas.openxmlformats.org/drawingml/2006/main" prst="rect">
+            <a:avLst/>
+          </a:prstGeom>
+          <a:noFill xmlns:a="http://schemas.openxmlformats.org/drawingml/2006/main"/>
+          <a:ln xmlns:a="http://schemas.openxmlformats.org/drawingml/2006/main" w="0">
+            <a:noFill/>
+          </a:ln>
+        </p:spPr>
+        <p:txBody>
+          <a:bodyPr xmlns:a="http://schemas.openxmlformats.org/drawingml/2006/main" wrap="square" lIns="0" tIns="0" rIns="0" bIns="0" anchor="t"/>
+          <a:lstStyle xmlns:a="http://schemas.openxmlformats.org/drawingml/2006/main"/>
+          <a:p xmlns:a="http://schemas.openxmlformats.org/drawingml/2006/main">
+            <a:pPr algn="ctr"/>
+            <a:r>
+              <a:rPr lang="en-US" sz="1350" b="1">
+                <a:solidFill>
+                  <a:srgbClr val="F2F6F8"/>
+                </a:solidFill>
+                <a:latin typeface="Inter"/>
+                <a:ea typeface="Inter"/>
+              </a:rPr>
+              <a:t>Test</a:t>
+            </a:r>
+            <a:endParaRPr lang="en-US"/>
+          </a:p>
+        </p:txBody>
+      </p:sp>
+      <p:sp>
+        <p:nvSpPr>
+          <p:cNvPr id="28" name="timeline-text-1"/>
+          <p:cNvSpPr txBox="1"/>
+          <p:nvPr/>
+        </p:nvSpPr>
+        <p:spPr>
+          <a:xfrm xmlns:a="http://schemas.openxmlformats.org/drawingml/2006/main">
+            <a:off x="2895600" y="5391150"/>
+            <a:ext cx="1790700" cy="361950"/>
+          </a:xfrm>
+          <a:prstGeom xmlns:a="http://schemas.openxmlformats.org/drawingml/2006/main" prst="rect">
+            <a:avLst/>
+          </a:prstGeom>
+          <a:noFill xmlns:a="http://schemas.openxmlformats.org/drawingml/2006/main"/>
+          <a:ln xmlns:a="http://schemas.openxmlformats.org/drawingml/2006/main" w="0">
+            <a:noFill/>
+          </a:ln>
+        </p:spPr>
+        <p:txBody>
+          <a:bodyPr xmlns:a="http://schemas.openxmlformats.org/drawingml/2006/main" wrap="square" lIns="0" tIns="0" rIns="0" bIns="0" anchor="t"/>
+          <a:lstStyle xmlns:a="http://schemas.openxmlformats.org/drawingml/2006/main"/>
+          <a:p xmlns:a="http://schemas.openxmlformats.org/drawingml/2006/main">
+            <a:pPr algn="ctr"/>
+            <a:r>
+              <a:rPr lang="en-US" sz="1050">
+                <a:solidFill>
+                  <a:srgbClr val="787B7F"/>
+                </a:solidFill>
+                <a:latin typeface="Inter"/>
+                <a:ea typeface="Inter"/>
+              </a:rPr>
+              <a:t>Hold the rule</a:t>
+            </a:r>
+            <a:endParaRPr lang="en-US"/>
+          </a:p>
+        </p:txBody>
+      </p:sp>
+      <p:sp>
+        <p:nvSpPr>
+          <p:cNvPr id="29" name="timeline-node-2"/>
+          <p:cNvSpPr/>
+          <p:nvPr/>
+        </p:nvSpPr>
+        <p:spPr>
+          <a:xfrm xmlns:a="http://schemas.openxmlformats.org/drawingml/2006/main">
+            <a:off x="6210300" y="4610100"/>
+            <a:ext cx="304800" cy="304800"/>
+          </a:xfrm>
+          <a:prstGeom xmlns:a="http://schemas.openxmlformats.org/drawingml/2006/main" prst="ellipse">
+            <a:avLst/>
+          </a:prstGeom>
+          <a:solidFill xmlns:a="http://schemas.openxmlformats.org/drawingml/2006/main">
+            <a:srgbClr val="070A10"/>
+          </a:solidFill>
+          <a:ln xmlns:a="http://schemas.openxmlformats.org/drawingml/2006/main" w="25400">
+            <a:solidFill>
+              <a:srgbClr val="F2F6F8"/>
+            </a:solidFill>
+            <a:prstDash val="solid"/>
+          </a:ln>
+        </p:spPr>
+        <p:txBody>
+          <a:bodyPr xmlns:a="http://schemas.openxmlformats.org/drawingml/2006/main" wrap="square" lIns="0" tIns="0" rIns="0" bIns="0" anchor="t"/>
+          <a:lstStyle xmlns:a="http://schemas.openxmlformats.org/drawingml/2006/main"/>
+          <a:p xmlns:a="http://schemas.openxmlformats.org/drawingml/2006/main">
+            <a:r>
+              <a:rPr lang="en-US"/>
+              <a:t/>
+            </a:r>
+            <a:endParaRPr lang="en-US"/>
+          </a:p>
+        </p:txBody>
+      </p:sp>
+      <p:sp>
+        <p:nvSpPr>
+          <p:cNvPr id="30" name="timeline-number-2"/>
+          <p:cNvSpPr txBox="1"/>
+          <p:nvPr/>
+        </p:nvSpPr>
+        <p:spPr>
+          <a:xfrm xmlns:a="http://schemas.openxmlformats.org/drawingml/2006/main">
+            <a:off x="6096000" y="4076700"/>
+            <a:ext cx="533400" cy="190500"/>
+          </a:xfrm>
+          <a:prstGeom xmlns:a="http://schemas.openxmlformats.org/drawingml/2006/main" prst="rect">
+            <a:avLst/>
+          </a:prstGeom>
+          <a:noFill xmlns:a="http://schemas.openxmlformats.org/drawingml/2006/main"/>
+          <a:ln xmlns:a="http://schemas.openxmlformats.org/drawingml/2006/main" w="0">
+            <a:noFill/>
+          </a:ln>
+        </p:spPr>
+        <p:txBody>
+          <a:bodyPr xmlns:a="http://schemas.openxmlformats.org/drawingml/2006/main" wrap="square" lIns="0" tIns="0" rIns="0" bIns="0" anchor="t"/>
+          <a:lstStyle xmlns:a="http://schemas.openxmlformats.org/drawingml/2006/main"/>
+          <a:p xmlns:a="http://schemas.openxmlformats.org/drawingml/2006/main">
+            <a:pPr algn="ctr"/>
+            <a:r>
+              <a:rPr lang="en-US" sz="975" b="1">
+                <a:solidFill>
+                  <a:srgbClr val="20BBD8"/>
+                </a:solidFill>
+                <a:latin typeface="Inter"/>
+                <a:ea typeface="Inter"/>
+              </a:rPr>
+              <a:t>03</a:t>
+            </a:r>
+            <a:endParaRPr lang="en-US"/>
+          </a:p>
+        </p:txBody>
+      </p:sp>
+      <p:sp>
+        <p:nvSpPr>
+          <p:cNvPr id="31" name="timeline-label-2"/>
+          <p:cNvSpPr txBox="1"/>
+          <p:nvPr/>
+        </p:nvSpPr>
+        <p:spPr>
+          <a:xfrm xmlns:a="http://schemas.openxmlformats.org/drawingml/2006/main">
+            <a:off x="5676900" y="5086350"/>
+            <a:ext cx="1371600" cy="228600"/>
+          </a:xfrm>
+          <a:prstGeom xmlns:a="http://schemas.openxmlformats.org/drawingml/2006/main" prst="rect">
+            <a:avLst/>
+          </a:prstGeom>
+          <a:noFill xmlns:a="http://schemas.openxmlformats.org/drawingml/2006/main"/>
+          <a:ln xmlns:a="http://schemas.openxmlformats.org/drawingml/2006/main" w="0">
+            <a:noFill/>
+          </a:ln>
+        </p:spPr>
+        <p:txBody>
+          <a:bodyPr xmlns:a="http://schemas.openxmlformats.org/drawingml/2006/main" wrap="square" lIns="0" tIns="0" rIns="0" bIns="0" anchor="t"/>
+          <a:lstStyle xmlns:a="http://schemas.openxmlformats.org/drawingml/2006/main"/>
+          <a:p xmlns:a="http://schemas.openxmlformats.org/drawingml/2006/main">
+            <a:pPr algn="ctr"/>
+            <a:r>
+              <a:rPr lang="en-US" sz="1350" b="1">
+                <a:solidFill>
+                  <a:srgbClr val="F2F6F8"/>
+                </a:solidFill>
+                <a:latin typeface="Inter"/>
+                <a:ea typeface="Inter"/>
+              </a:rPr>
+              <a:t>Read</a:t>
+            </a:r>
+            <a:endParaRPr lang="en-US"/>
+          </a:p>
+        </p:txBody>
+      </p:sp>
+      <p:sp>
+        <p:nvSpPr>
+          <p:cNvPr id="32" name="timeline-text-2"/>
+          <p:cNvSpPr txBox="1"/>
+          <p:nvPr/>
+        </p:nvSpPr>
+        <p:spPr>
+          <a:xfrm xmlns:a="http://schemas.openxmlformats.org/drawingml/2006/main">
+            <a:off x="5467350" y="5391150"/>
+            <a:ext cx="1790700" cy="361950"/>
+          </a:xfrm>
+          <a:prstGeom xmlns:a="http://schemas.openxmlformats.org/drawingml/2006/main" prst="rect">
+            <a:avLst/>
+          </a:prstGeom>
+          <a:noFill xmlns:a="http://schemas.openxmlformats.org/drawingml/2006/main"/>
+          <a:ln xmlns:a="http://schemas.openxmlformats.org/drawingml/2006/main" w="0">
+            <a:noFill/>
+          </a:ln>
+        </p:spPr>
+        <p:txBody>
+          <a:bodyPr xmlns:a="http://schemas.openxmlformats.org/drawingml/2006/main" wrap="square" lIns="0" tIns="0" rIns="0" bIns="0" anchor="t"/>
+          <a:lstStyle xmlns:a="http://schemas.openxmlformats.org/drawingml/2006/main"/>
+          <a:p xmlns:a="http://schemas.openxmlformats.org/drawingml/2006/main">
+            <a:pPr algn="ctr"/>
+            <a:r>
+              <a:rPr lang="en-US" sz="1050">
+                <a:solidFill>
+                  <a:srgbClr val="787B7F"/>
+                </a:solidFill>
+                <a:latin typeface="Inter"/>
+                <a:ea typeface="Inter"/>
+              </a:rPr>
+              <a:t>Separate signal</a:t>
+            </a:r>
+            <a:endParaRPr lang="en-US"/>
+          </a:p>
+        </p:txBody>
+      </p:sp>
+      <p:sp>
+        <p:nvSpPr>
+          <p:cNvPr id="33" name="timeline-node-3"/>
+          <p:cNvSpPr/>
+          <p:nvPr/>
+        </p:nvSpPr>
+        <p:spPr>
+          <a:xfrm xmlns:a="http://schemas.openxmlformats.org/drawingml/2006/main">
+            <a:off x="8782050" y="4610100"/>
+            <a:ext cx="304800" cy="304800"/>
+          </a:xfrm>
+          <a:prstGeom xmlns:a="http://schemas.openxmlformats.org/drawingml/2006/main" prst="ellipse">
+            <a:avLst/>
+          </a:prstGeom>
+          <a:solidFill xmlns:a="http://schemas.openxmlformats.org/drawingml/2006/main">
+            <a:srgbClr val="070A10"/>
+          </a:solidFill>
+          <a:ln xmlns:a="http://schemas.openxmlformats.org/drawingml/2006/main" w="25400">
+            <a:solidFill>
+              <a:srgbClr val="F2F6F8"/>
+            </a:solidFill>
+            <a:prstDash val="solid"/>
+          </a:ln>
+        </p:spPr>
+        <p:txBody>
+          <a:bodyPr xmlns:a="http://schemas.openxmlformats.org/drawingml/2006/main" wrap="square" lIns="0" tIns="0" rIns="0" bIns="0" anchor="t"/>
+          <a:lstStyle xmlns:a="http://schemas.openxmlformats.org/drawingml/2006/main"/>
+          <a:p xmlns:a="http://schemas.openxmlformats.org/drawingml/2006/main">
+            <a:r>
+              <a:rPr lang="en-US"/>
+              <a:t/>
+            </a:r>
+            <a:endParaRPr lang="en-US"/>
+          </a:p>
+        </p:txBody>
+      </p:sp>
+      <p:sp>
+        <p:nvSpPr>
+          <p:cNvPr id="34" name="timeline-number-3"/>
+          <p:cNvSpPr txBox="1"/>
+          <p:nvPr/>
+        </p:nvSpPr>
+        <p:spPr>
+          <a:xfrm xmlns:a="http://schemas.openxmlformats.org/drawingml/2006/main">
+            <a:off x="8667750" y="4076700"/>
+            <a:ext cx="533400" cy="190500"/>
+          </a:xfrm>
+          <a:prstGeom xmlns:a="http://schemas.openxmlformats.org/drawingml/2006/main" prst="rect">
+            <a:avLst/>
+          </a:prstGeom>
+          <a:noFill xmlns:a="http://schemas.openxmlformats.org/drawingml/2006/main"/>
+          <a:ln xmlns:a="http://schemas.openxmlformats.org/drawingml/2006/main" w="0">
+            <a:noFill/>
+          </a:ln>
+        </p:spPr>
+        <p:txBody>
+          <a:bodyPr xmlns:a="http://schemas.openxmlformats.org/drawingml/2006/main" wrap="square" lIns="0" tIns="0" rIns="0" bIns="0" anchor="t"/>
+          <a:lstStyle xmlns:a="http://schemas.openxmlformats.org/drawingml/2006/main"/>
+          <a:p xmlns:a="http://schemas.openxmlformats.org/drawingml/2006/main">
+            <a:pPr algn="ctr"/>
+            <a:r>
+              <a:rPr lang="en-US" sz="975" b="1">
+                <a:solidFill>
+                  <a:srgbClr val="20BBD8"/>
+                </a:solidFill>
+                <a:latin typeface="Inter"/>
+                <a:ea typeface="Inter"/>
+              </a:rPr>
+              <a:t>04</a:t>
+            </a:r>
+            <a:endParaRPr lang="en-US"/>
+          </a:p>
+        </p:txBody>
+      </p:sp>
+      <p:sp>
+        <p:nvSpPr>
+          <p:cNvPr id="35" name="timeline-label-3"/>
+          <p:cNvSpPr txBox="1"/>
+          <p:nvPr/>
+        </p:nvSpPr>
+        <p:spPr>
+          <a:xfrm xmlns:a="http://schemas.openxmlformats.org/drawingml/2006/main">
+            <a:off x="8248650" y="5086350"/>
+            <a:ext cx="1371600" cy="228600"/>
+          </a:xfrm>
+          <a:prstGeom xmlns:a="http://schemas.openxmlformats.org/drawingml/2006/main" prst="rect">
+            <a:avLst/>
+          </a:prstGeom>
+          <a:noFill xmlns:a="http://schemas.openxmlformats.org/drawingml/2006/main"/>
+          <a:ln xmlns:a="http://schemas.openxmlformats.org/drawingml/2006/main" w="0">
+            <a:noFill/>
+          </a:ln>
+        </p:spPr>
+        <p:txBody>
+          <a:bodyPr xmlns:a="http://schemas.openxmlformats.org/drawingml/2006/main" wrap="square" lIns="0" tIns="0" rIns="0" bIns="0" anchor="t"/>
+          <a:lstStyle xmlns:a="http://schemas.openxmlformats.org/drawingml/2006/main"/>
+          <a:p xmlns:a="http://schemas.openxmlformats.org/drawingml/2006/main">
+            <a:pPr algn="ctr"/>
+            <a:r>
+              <a:rPr lang="en-US" sz="1350" b="1">
+                <a:solidFill>
+                  <a:srgbClr val="F2F6F8"/>
+                </a:solidFill>
+                <a:latin typeface="Inter"/>
+                <a:ea typeface="Inter"/>
+              </a:rPr>
+              <a:t>Move</a:t>
+            </a:r>
+            <a:endParaRPr lang="en-US"/>
+          </a:p>
+        </p:txBody>
+      </p:sp>
+      <p:sp>
+        <p:nvSpPr>
+          <p:cNvPr id="36" name="timeline-text-3"/>
+          <p:cNvSpPr txBox="1"/>
+          <p:nvPr/>
+        </p:nvSpPr>
+        <p:spPr>
+          <a:xfrm xmlns:a="http://schemas.openxmlformats.org/drawingml/2006/main">
+            <a:off x="8039100" y="5391150"/>
+            <a:ext cx="1790700" cy="361950"/>
+          </a:xfrm>
+          <a:prstGeom xmlns:a="http://schemas.openxmlformats.org/drawingml/2006/main" prst="rect">
+            <a:avLst/>
+          </a:prstGeom>
+          <a:noFill xmlns:a="http://schemas.openxmlformats.org/drawingml/2006/main"/>
+          <a:ln xmlns:a="http://schemas.openxmlformats.org/drawingml/2006/main" w="0">
+            <a:noFill/>
+          </a:ln>
+        </p:spPr>
+        <p:txBody>
+          <a:bodyPr xmlns:a="http://schemas.openxmlformats.org/drawingml/2006/main" wrap="square" lIns="0" tIns="0" rIns="0" bIns="0" anchor="t"/>
+          <a:lstStyle xmlns:a="http://schemas.openxmlformats.org/drawingml/2006/main"/>
+          <a:p xmlns:a="http://schemas.openxmlformats.org/drawingml/2006/main">
+            <a:pPr algn="ctr"/>
+            <a:r>
+              <a:rPr lang="en-US" sz="1050">
+                <a:solidFill>
+                  <a:srgbClr val="787B7F"/>
+                </a:solidFill>
+                <a:latin typeface="Inter"/>
+                <a:ea typeface="Inter"/>
+              </a:rPr>
+              <a:t>Set the next gate</a:t>
+            </a:r>
+            <a:endParaRPr lang="en-US"/>
+          </a:p>
+        </p:txBody>
+      </p:sp>
+      <p:sp>
+        <p:nvSpPr>
+          <p:cNvPr id="37" name="timeline-node-4"/>
+          <p:cNvSpPr/>
+          <p:nvPr/>
+        </p:nvSpPr>
+        <p:spPr>
+          <a:xfrm xmlns:a="http://schemas.openxmlformats.org/drawingml/2006/main">
+            <a:off x="11353800" y="4610100"/>
+            <a:ext cx="304800" cy="304800"/>
+          </a:xfrm>
+          <a:prstGeom xmlns:a="http://schemas.openxmlformats.org/drawingml/2006/main" prst="ellipse">
+            <a:avLst/>
+          </a:prstGeom>
+          <a:solidFill xmlns:a="http://schemas.openxmlformats.org/drawingml/2006/main">
+            <a:srgbClr val="20BBD8"/>
+          </a:solidFill>
+          <a:ln xmlns:a="http://schemas.openxmlformats.org/drawingml/2006/main" w="25400">
+            <a:solidFill>
               <a:srgbClr val="20BBD8"/>
             </a:solidFill>
             <a:prstDash val="solid"/>
@@ -3809,14 +3941,128 @@
       </p:sp>
       <p:sp>
         <p:nvSpPr>
-          <p:cNvPr id="22" name="dense-read-label"/>
-          <p:cNvSpPr txBox="1"/>
-          <p:nvPr/>
-        </p:nvSpPr>
-        <p:spPr>
-          <a:xfrm xmlns:a="http://schemas.openxmlformats.org/drawingml/2006/main">
-            <a:off x="11315700" y="3543300"/>
-            <a:ext cx="2667000" cy="209550"/>
+          <p:cNvPr id="38" name="timeline-number-4"/>
+          <p:cNvSpPr txBox="1"/>
+          <p:nvPr/>
+        </p:nvSpPr>
+        <p:spPr>
+          <a:xfrm xmlns:a="http://schemas.openxmlformats.org/drawingml/2006/main">
+            <a:off x="11239500" y="4076700"/>
+            <a:ext cx="533400" cy="190500"/>
+          </a:xfrm>
+          <a:prstGeom xmlns:a="http://schemas.openxmlformats.org/drawingml/2006/main" prst="rect">
+            <a:avLst/>
+          </a:prstGeom>
+          <a:noFill xmlns:a="http://schemas.openxmlformats.org/drawingml/2006/main"/>
+          <a:ln xmlns:a="http://schemas.openxmlformats.org/drawingml/2006/main" w="0">
+            <a:noFill/>
+          </a:ln>
+        </p:spPr>
+        <p:txBody>
+          <a:bodyPr xmlns:a="http://schemas.openxmlformats.org/drawingml/2006/main" wrap="square" lIns="0" tIns="0" rIns="0" bIns="0" anchor="t"/>
+          <a:lstStyle xmlns:a="http://schemas.openxmlformats.org/drawingml/2006/main"/>
+          <a:p xmlns:a="http://schemas.openxmlformats.org/drawingml/2006/main">
+            <a:pPr algn="ctr"/>
+            <a:r>
+              <a:rPr lang="en-US" sz="975" b="1">
+                <a:solidFill>
+                  <a:srgbClr val="20BBD8"/>
+                </a:solidFill>
+                <a:latin typeface="Inter"/>
+                <a:ea typeface="Inter"/>
+              </a:rPr>
+              <a:t>05</a:t>
+            </a:r>
+            <a:endParaRPr lang="en-US"/>
+          </a:p>
+        </p:txBody>
+      </p:sp>
+      <p:sp>
+        <p:nvSpPr>
+          <p:cNvPr id="39" name="timeline-label-4"/>
+          <p:cNvSpPr txBox="1"/>
+          <p:nvPr/>
+        </p:nvSpPr>
+        <p:spPr>
+          <a:xfrm xmlns:a="http://schemas.openxmlformats.org/drawingml/2006/main">
+            <a:off x="10820400" y="5086350"/>
+            <a:ext cx="1371600" cy="228600"/>
+          </a:xfrm>
+          <a:prstGeom xmlns:a="http://schemas.openxmlformats.org/drawingml/2006/main" prst="rect">
+            <a:avLst/>
+          </a:prstGeom>
+          <a:noFill xmlns:a="http://schemas.openxmlformats.org/drawingml/2006/main"/>
+          <a:ln xmlns:a="http://schemas.openxmlformats.org/drawingml/2006/main" w="0">
+            <a:noFill/>
+          </a:ln>
+        </p:spPr>
+        <p:txBody>
+          <a:bodyPr xmlns:a="http://schemas.openxmlformats.org/drawingml/2006/main" wrap="square" lIns="0" tIns="0" rIns="0" bIns="0" anchor="t"/>
+          <a:lstStyle xmlns:a="http://schemas.openxmlformats.org/drawingml/2006/main"/>
+          <a:p xmlns:a="http://schemas.openxmlformats.org/drawingml/2006/main">
+            <a:pPr algn="ctr"/>
+            <a:r>
+              <a:rPr lang="en-US" sz="1350" b="1">
+                <a:solidFill>
+                  <a:srgbClr val="F2F6F8"/>
+                </a:solidFill>
+                <a:latin typeface="Inter"/>
+                <a:ea typeface="Inter"/>
+              </a:rPr>
+              <a:t>Scale</a:t>
+            </a:r>
+            <a:endParaRPr lang="en-US"/>
+          </a:p>
+        </p:txBody>
+      </p:sp>
+      <p:sp>
+        <p:nvSpPr>
+          <p:cNvPr id="40" name="timeline-text-4"/>
+          <p:cNvSpPr txBox="1"/>
+          <p:nvPr/>
+        </p:nvSpPr>
+        <p:spPr>
+          <a:xfrm xmlns:a="http://schemas.openxmlformats.org/drawingml/2006/main">
+            <a:off x="10610850" y="5391150"/>
+            <a:ext cx="1790700" cy="361950"/>
+          </a:xfrm>
+          <a:prstGeom xmlns:a="http://schemas.openxmlformats.org/drawingml/2006/main" prst="rect">
+            <a:avLst/>
+          </a:prstGeom>
+          <a:noFill xmlns:a="http://schemas.openxmlformats.org/drawingml/2006/main"/>
+          <a:ln xmlns:a="http://schemas.openxmlformats.org/drawingml/2006/main" w="0">
+            <a:noFill/>
+          </a:ln>
+        </p:spPr>
+        <p:txBody>
+          <a:bodyPr xmlns:a="http://schemas.openxmlformats.org/drawingml/2006/main" wrap="square" lIns="0" tIns="0" rIns="0" bIns="0" anchor="t"/>
+          <a:lstStyle xmlns:a="http://schemas.openxmlformats.org/drawingml/2006/main"/>
+          <a:p xmlns:a="http://schemas.openxmlformats.org/drawingml/2006/main">
+            <a:pPr algn="ctr"/>
+            <a:r>
+              <a:rPr lang="en-US" sz="1050">
+                <a:solidFill>
+                  <a:srgbClr val="787B7F"/>
+                </a:solidFill>
+                <a:latin typeface="Inter"/>
+                <a:ea typeface="Inter"/>
+              </a:rPr>
+              <a:t>Repeat what held</a:t>
+            </a:r>
+            <a:endParaRPr lang="en-US"/>
+          </a:p>
+        </p:txBody>
+      </p:sp>
+      <p:sp>
+        <p:nvSpPr>
+          <p:cNvPr id="41" name="timeline-read-label"/>
+          <p:cNvSpPr txBox="1"/>
+          <p:nvPr/>
+        </p:nvSpPr>
+        <p:spPr>
+          <a:xfrm xmlns:a="http://schemas.openxmlformats.org/drawingml/2006/main">
+            <a:off x="1066800" y="6667500"/>
+            <a:ext cx="2286000" cy="209550"/>
           </a:xfrm>
           <a:prstGeom xmlns:a="http://schemas.openxmlformats.org/drawingml/2006/main" prst="rect">
             <a:avLst/>
@@ -3846,81 +4092,44 @@
       </p:sp>
       <p:sp>
         <p:nvSpPr>
-          <p:cNvPr id="23" name="dense-read-title"/>
-          <p:cNvSpPr txBox="1"/>
-          <p:nvPr/>
-        </p:nvSpPr>
-        <p:spPr>
-          <a:xfrm xmlns:a="http://schemas.openxmlformats.org/drawingml/2006/main">
-            <a:off x="11315700" y="4000500"/>
-            <a:ext cx="2667000" cy="685800"/>
-          </a:xfrm>
-          <a:prstGeom xmlns:a="http://schemas.openxmlformats.org/drawingml/2006/main" prst="rect">
-            <a:avLst/>
-          </a:prstGeom>
-          <a:noFill xmlns:a="http://schemas.openxmlformats.org/drawingml/2006/main"/>
-          <a:ln xmlns:a="http://schemas.openxmlformats.org/drawingml/2006/main" w="0">
-            <a:noFill/>
-          </a:ln>
-        </p:spPr>
-        <p:txBody>
-          <a:bodyPr xmlns:a="http://schemas.openxmlformats.org/drawingml/2006/main" wrap="square" lIns="0" tIns="0" rIns="0" bIns="0" anchor="t"/>
-          <a:lstStyle xmlns:a="http://schemas.openxmlformats.org/drawingml/2006/main"/>
-          <a:p xmlns:a="http://schemas.openxmlformats.org/drawingml/2006/main">
-            <a:r>
-              <a:rPr lang="en-US" sz="1725" b="1">
+          <p:cNvPr id="42" name="timeline-read"/>
+          <p:cNvSpPr txBox="1"/>
+          <p:nvPr/>
+        </p:nvSpPr>
+        <p:spPr>
+          <a:xfrm xmlns:a="http://schemas.openxmlformats.org/drawingml/2006/main">
+            <a:off x="3333750" y="6629400"/>
+            <a:ext cx="8191500" cy="266700"/>
+          </a:xfrm>
+          <a:prstGeom xmlns:a="http://schemas.openxmlformats.org/drawingml/2006/main" prst="rect">
+            <a:avLst/>
+          </a:prstGeom>
+          <a:noFill xmlns:a="http://schemas.openxmlformats.org/drawingml/2006/main"/>
+          <a:ln xmlns:a="http://schemas.openxmlformats.org/drawingml/2006/main" w="0">
+            <a:noFill/>
+          </a:ln>
+        </p:spPr>
+        <p:txBody>
+          <a:bodyPr xmlns:a="http://schemas.openxmlformats.org/drawingml/2006/main" wrap="square" lIns="0" tIns="0" rIns="0" bIns="0" anchor="t"/>
+          <a:lstStyle xmlns:a="http://schemas.openxmlformats.org/drawingml/2006/main"/>
+          <a:p xmlns:a="http://schemas.openxmlformats.org/drawingml/2006/main">
+            <a:r>
+              <a:rPr lang="en-US" sz="1425" b="1">
                 <a:solidFill>
                   <a:srgbClr val="F2F6F8"/>
                 </a:solidFill>
                 <a:latin typeface="Inter"/>
                 <a:ea typeface="Inter"/>
               </a:rPr>
-              <a:t>The signal earns its space.</a:t>
-            </a:r>
-            <a:endParaRPr lang="en-US"/>
-          </a:p>
-        </p:txBody>
-      </p:sp>
-      <p:sp>
-        <p:nvSpPr>
-          <p:cNvPr id="24" name="dense-read-body"/>
-          <p:cNvSpPr txBox="1"/>
-          <p:nvPr/>
-        </p:nvSpPr>
-        <p:spPr>
-          <a:xfrm xmlns:a="http://schemas.openxmlformats.org/drawingml/2006/main">
-            <a:off x="11315700" y="4953000"/>
-            <a:ext cx="2667000" cy="819150"/>
-          </a:xfrm>
-          <a:prstGeom xmlns:a="http://schemas.openxmlformats.org/drawingml/2006/main" prst="rect">
-            <a:avLst/>
-          </a:prstGeom>
-          <a:noFill xmlns:a="http://schemas.openxmlformats.org/drawingml/2006/main"/>
-          <a:ln xmlns:a="http://schemas.openxmlformats.org/drawingml/2006/main" w="0">
-            <a:noFill/>
-          </a:ln>
-        </p:spPr>
-        <p:txBody>
-          <a:bodyPr xmlns:a="http://schemas.openxmlformats.org/drawingml/2006/main" wrap="square" lIns="0" tIns="0" rIns="0" bIns="0" anchor="t"/>
-          <a:lstStyle xmlns:a="http://schemas.openxmlformats.org/drawingml/2006/main"/>
-          <a:p xmlns:a="http://schemas.openxmlformats.org/drawingml/2006/main">
-            <a:r>
-              <a:rPr lang="en-US" sz="1200">
-                <a:solidFill>
-                  <a:srgbClr val="787B7F"/>
-                </a:solidFill>
-                <a:latin typeface="Inter"/>
-                <a:ea typeface="Inter"/>
-              </a:rPr>
-              <a:t>Every mark answers the page's question; remove anything that does not.</a:t>
-            </a:r>
-            <a:endParaRPr lang="en-US"/>
-          </a:p>
-        </p:txBody>
-      </p:sp>
-      <p:sp>
-        <p:nvSpPr>
-          <p:cNvPr id="25" name="evidence-band"/>
+              <a:t>A sequence is useful when each handoff changes what can happen next.</a:t>
+            </a:r>
+            <a:endParaRPr lang="en-US"/>
+          </a:p>
+        </p:txBody>
+      </p:sp>
+      <p:sp>
+        <p:nvSpPr>
+          <p:cNvPr id="43" name="evidence-band"/>
           <p:cNvSpPr/>
           <p:nvPr/>
         </p:nvSpPr>
@@ -3956,7 +4165,7 @@
       </p:sp>
       <p:sp>
         <p:nvSpPr>
-          <p:cNvPr id="26" name="evidence-band-text"/>
+          <p:cNvPr id="44" name="evidence-band-text"/>
           <p:cNvSpPr txBox="1"/>
           <p:nvPr/>
         </p:nvSpPr>
@@ -3993,7 +4202,7 @@
       </p:sp>
       <p:sp>
         <p:nvSpPr>
-          <p:cNvPr id="27" name="source"/>
+          <p:cNvPr id="45" name="source"/>
           <p:cNvSpPr txBox="1"/>
           <p:nvPr/>
         </p:nvSpPr>
@@ -4030,7 +4239,7 @@
       </p:sp>
       <p:sp>
         <p:nvSpPr>
-          <p:cNvPr id="28" name="page-number"/>
+          <p:cNvPr id="46" name="page-number"/>
           <p:cNvSpPr txBox="1"/>
           <p:nvPr/>
         </p:nvSpPr>
@@ -6053,45 +6262,780 @@
           </a:p>
         </p:txBody>
       </p:sp>
-      <p:graphicFrame>
-        <p:nvGraphicFramePr>
-          <p:cNvPr id="19" name="dense-visual-bars"/>
-          <p:cNvGraphicFramePr>
-            <a:graphicFrameLocks xmlns:a="http://schemas.openxmlformats.org/drawingml/2006/main" noGrp="1"/>
-          </p:cNvGraphicFramePr>
-          <p:nvPr/>
-        </p:nvGraphicFramePr>
-        <p:xfrm>
-          <a:off xmlns:a="http://schemas.openxmlformats.org/drawingml/2006/main" x="914400" y="3028950"/>
-          <a:ext xmlns:a="http://schemas.openxmlformats.org/drawingml/2006/main" cx="5334000" cy="3143250"/>
-        </p:xfrm>
-        <a:graphic xmlns:a="http://schemas.openxmlformats.org/drawingml/2006/main">
-          <a:graphicData uri="http://schemas.openxmlformats.org/drawingml/2006/chart">
-            <c:chart xmlns:r="http://schemas.openxmlformats.org/officeDocument/2006/relationships" xmlns:c="http://schemas.openxmlformats.org/drawingml/2006/chart" r:id="Rd45c05f779f842ed"/>
-          </a:graphicData>
-        </a:graphic>
-      </p:graphicFrame>
-      <p:graphicFrame>
-        <p:nvGraphicFramePr>
-          <p:cNvPr id="20" name="dense-visual-line"/>
-          <p:cNvGraphicFramePr>
-            <a:graphicFrameLocks xmlns:a="http://schemas.openxmlformats.org/drawingml/2006/main" noGrp="1"/>
-          </p:cNvGraphicFramePr>
-          <p:nvPr/>
-        </p:nvGraphicFramePr>
-        <p:xfrm>
-          <a:off xmlns:a="http://schemas.openxmlformats.org/drawingml/2006/main" x="6667500" y="3028950"/>
-          <a:ext xmlns:a="http://schemas.openxmlformats.org/drawingml/2006/main" cx="3810000" cy="3143250"/>
-        </p:xfrm>
-        <a:graphic xmlns:a="http://schemas.openxmlformats.org/drawingml/2006/main">
-          <a:graphicData uri="http://schemas.openxmlformats.org/drawingml/2006/chart">
-            <c:chart xmlns:r="http://schemas.openxmlformats.org/officeDocument/2006/relationships" xmlns:c="http://schemas.openxmlformats.org/drawingml/2006/chart" r:id="Rf086b4177c514f84"/>
-          </a:graphicData>
-        </a:graphic>
-      </p:graphicFrame>
-      <p:sp>
-        <p:nvSpPr>
-          <p:cNvPr id="21" name="visual-note"/>
+      <p:sp>
+        <p:nvSpPr>
+          <p:cNvPr id="19" name="visual-process-rail"/>
+          <p:cNvSpPr/>
+          <p:nvPr/>
+        </p:nvSpPr>
+        <p:spPr>
+          <a:xfrm xmlns:a="http://schemas.openxmlformats.org/drawingml/2006/main">
+            <a:off x="1447800" y="3524250"/>
+            <a:ext cx="0" cy="2647950"/>
+          </a:xfrm>
+          <a:prstGeom xmlns:a="http://schemas.openxmlformats.org/drawingml/2006/main" prst="line">
+            <a:avLst/>
+          </a:prstGeom>
+          <a:noFill xmlns:a="http://schemas.openxmlformats.org/drawingml/2006/main"/>
+          <a:ln xmlns:a="http://schemas.openxmlformats.org/drawingml/2006/main" w="25400">
+            <a:solidFill>
+              <a:srgbClr val="787B7F"/>
+            </a:solidFill>
+            <a:prstDash val="solid"/>
+          </a:ln>
+        </p:spPr>
+        <p:txBody>
+          <a:bodyPr xmlns:a="http://schemas.openxmlformats.org/drawingml/2006/main" wrap="square" lIns="0" tIns="0" rIns="0" bIns="0" anchor="t"/>
+          <a:lstStyle xmlns:a="http://schemas.openxmlformats.org/drawingml/2006/main"/>
+          <a:p xmlns:a="http://schemas.openxmlformats.org/drawingml/2006/main">
+            <a:r>
+              <a:rPr lang="en-US"/>
+              <a:t/>
+            </a:r>
+            <a:endParaRPr lang="en-US"/>
+          </a:p>
+        </p:txBody>
+      </p:sp>
+      <p:sp>
+        <p:nvSpPr>
+          <p:cNvPr id="20" name="visual-process-node-0"/>
+          <p:cNvSpPr/>
+          <p:nvPr/>
+        </p:nvSpPr>
+        <p:spPr>
+          <a:xfrm xmlns:a="http://schemas.openxmlformats.org/drawingml/2006/main">
+            <a:off x="1257300" y="3352800"/>
+            <a:ext cx="400050" cy="400050"/>
+          </a:xfrm>
+          <a:prstGeom xmlns:a="http://schemas.openxmlformats.org/drawingml/2006/main" prst="ellipse">
+            <a:avLst/>
+          </a:prstGeom>
+          <a:solidFill xmlns:a="http://schemas.openxmlformats.org/drawingml/2006/main">
+            <a:srgbClr val="070A10"/>
+          </a:solidFill>
+          <a:ln xmlns:a="http://schemas.openxmlformats.org/drawingml/2006/main" w="38100">
+            <a:solidFill>
+              <a:srgbClr val="F2F6F8"/>
+            </a:solidFill>
+            <a:prstDash val="solid"/>
+          </a:ln>
+        </p:spPr>
+        <p:txBody>
+          <a:bodyPr xmlns:a="http://schemas.openxmlformats.org/drawingml/2006/main" wrap="square" lIns="0" tIns="0" rIns="0" bIns="0" anchor="t"/>
+          <a:lstStyle xmlns:a="http://schemas.openxmlformats.org/drawingml/2006/main"/>
+          <a:p xmlns:a="http://schemas.openxmlformats.org/drawingml/2006/main">
+            <a:r>
+              <a:rPr lang="en-US"/>
+              <a:t/>
+            </a:r>
+            <a:endParaRPr lang="en-US"/>
+          </a:p>
+        </p:txBody>
+      </p:sp>
+      <p:sp>
+        <p:nvSpPr>
+          <p:cNvPr id="21" name="visual-process-number-0"/>
+          <p:cNvSpPr txBox="1"/>
+          <p:nvPr/>
+        </p:nvSpPr>
+        <p:spPr>
+          <a:xfrm xmlns:a="http://schemas.openxmlformats.org/drawingml/2006/main">
+            <a:off x="1238250" y="3467100"/>
+            <a:ext cx="438150" cy="152400"/>
+          </a:xfrm>
+          <a:prstGeom xmlns:a="http://schemas.openxmlformats.org/drawingml/2006/main" prst="rect">
+            <a:avLst/>
+          </a:prstGeom>
+          <a:noFill xmlns:a="http://schemas.openxmlformats.org/drawingml/2006/main"/>
+          <a:ln xmlns:a="http://schemas.openxmlformats.org/drawingml/2006/main" w="0">
+            <a:noFill/>
+          </a:ln>
+        </p:spPr>
+        <p:txBody>
+          <a:bodyPr xmlns:a="http://schemas.openxmlformats.org/drawingml/2006/main" wrap="square" lIns="0" tIns="0" rIns="0" bIns="0" anchor="t"/>
+          <a:lstStyle xmlns:a="http://schemas.openxmlformats.org/drawingml/2006/main"/>
+          <a:p xmlns:a="http://schemas.openxmlformats.org/drawingml/2006/main">
+            <a:pPr algn="ctr"/>
+            <a:r>
+              <a:rPr lang="en-US" sz="900" b="1">
+                <a:solidFill>
+                  <a:srgbClr val="20BBD8"/>
+                </a:solidFill>
+                <a:latin typeface="Inter"/>
+                <a:ea typeface="Inter"/>
+              </a:rPr>
+              <a:t>01</a:t>
+            </a:r>
+            <a:endParaRPr lang="en-US"/>
+          </a:p>
+        </p:txBody>
+      </p:sp>
+      <p:sp>
+        <p:nvSpPr>
+          <p:cNvPr id="22" name="visual-process-label-0"/>
+          <p:cNvSpPr txBox="1"/>
+          <p:nvPr/>
+        </p:nvSpPr>
+        <p:spPr>
+          <a:xfrm xmlns:a="http://schemas.openxmlformats.org/drawingml/2006/main">
+            <a:off x="1943100" y="3371850"/>
+            <a:ext cx="1714500" cy="228600"/>
+          </a:xfrm>
+          <a:prstGeom xmlns:a="http://schemas.openxmlformats.org/drawingml/2006/main" prst="rect">
+            <a:avLst/>
+          </a:prstGeom>
+          <a:noFill xmlns:a="http://schemas.openxmlformats.org/drawingml/2006/main"/>
+          <a:ln xmlns:a="http://schemas.openxmlformats.org/drawingml/2006/main" w="0">
+            <a:noFill/>
+          </a:ln>
+        </p:spPr>
+        <p:txBody>
+          <a:bodyPr xmlns:a="http://schemas.openxmlformats.org/drawingml/2006/main" wrap="square" lIns="0" tIns="0" rIns="0" bIns="0" anchor="t"/>
+          <a:lstStyle xmlns:a="http://schemas.openxmlformats.org/drawingml/2006/main"/>
+          <a:p xmlns:a="http://schemas.openxmlformats.org/drawingml/2006/main">
+            <a:r>
+              <a:rPr lang="en-US" sz="1650" b="1">
+                <a:solidFill>
+                  <a:srgbClr val="F2F6F8"/>
+                </a:solidFill>
+                <a:latin typeface="Inter"/>
+                <a:ea typeface="Inter"/>
+              </a:rPr>
+              <a:t>Observe</a:t>
+            </a:r>
+            <a:endParaRPr lang="en-US"/>
+          </a:p>
+        </p:txBody>
+      </p:sp>
+      <p:sp>
+        <p:nvSpPr>
+          <p:cNvPr id="23" name="visual-process-text-0"/>
+          <p:cNvSpPr txBox="1"/>
+          <p:nvPr/>
+        </p:nvSpPr>
+        <p:spPr>
+          <a:xfrm xmlns:a="http://schemas.openxmlformats.org/drawingml/2006/main">
+            <a:off x="3829050" y="3400425"/>
+            <a:ext cx="2476500" cy="228600"/>
+          </a:xfrm>
+          <a:prstGeom xmlns:a="http://schemas.openxmlformats.org/drawingml/2006/main" prst="rect">
+            <a:avLst/>
+          </a:prstGeom>
+          <a:noFill xmlns:a="http://schemas.openxmlformats.org/drawingml/2006/main"/>
+          <a:ln xmlns:a="http://schemas.openxmlformats.org/drawingml/2006/main" w="0">
+            <a:noFill/>
+          </a:ln>
+        </p:spPr>
+        <p:txBody>
+          <a:bodyPr xmlns:a="http://schemas.openxmlformats.org/drawingml/2006/main" wrap="square" lIns="0" tIns="0" rIns="0" bIns="0" anchor="t"/>
+          <a:lstStyle xmlns:a="http://schemas.openxmlformats.org/drawingml/2006/main"/>
+          <a:p xmlns:a="http://schemas.openxmlformats.org/drawingml/2006/main">
+            <a:r>
+              <a:rPr lang="en-US" sz="1275">
+                <a:solidFill>
+                  <a:srgbClr val="787B7F"/>
+                </a:solidFill>
+                <a:latin typeface="Inter"/>
+                <a:ea typeface="Inter"/>
+              </a:rPr>
+              <a:t>Find the signal</a:t>
+            </a:r>
+            <a:endParaRPr lang="en-US"/>
+          </a:p>
+        </p:txBody>
+      </p:sp>
+      <p:sp>
+        <p:nvSpPr>
+          <p:cNvPr id="24" name="visual-process-node-1"/>
+          <p:cNvSpPr/>
+          <p:nvPr/>
+        </p:nvSpPr>
+        <p:spPr>
+          <a:xfrm xmlns:a="http://schemas.openxmlformats.org/drawingml/2006/main">
+            <a:off x="1257300" y="4095750"/>
+            <a:ext cx="400050" cy="400050"/>
+          </a:xfrm>
+          <a:prstGeom xmlns:a="http://schemas.openxmlformats.org/drawingml/2006/main" prst="ellipse">
+            <a:avLst/>
+          </a:prstGeom>
+          <a:solidFill xmlns:a="http://schemas.openxmlformats.org/drawingml/2006/main">
+            <a:srgbClr val="070A10"/>
+          </a:solidFill>
+          <a:ln xmlns:a="http://schemas.openxmlformats.org/drawingml/2006/main" w="38100">
+            <a:solidFill>
+              <a:srgbClr val="F2F6F8"/>
+            </a:solidFill>
+            <a:prstDash val="solid"/>
+          </a:ln>
+        </p:spPr>
+        <p:txBody>
+          <a:bodyPr xmlns:a="http://schemas.openxmlformats.org/drawingml/2006/main" wrap="square" lIns="0" tIns="0" rIns="0" bIns="0" anchor="t"/>
+          <a:lstStyle xmlns:a="http://schemas.openxmlformats.org/drawingml/2006/main"/>
+          <a:p xmlns:a="http://schemas.openxmlformats.org/drawingml/2006/main">
+            <a:r>
+              <a:rPr lang="en-US"/>
+              <a:t/>
+            </a:r>
+            <a:endParaRPr lang="en-US"/>
+          </a:p>
+        </p:txBody>
+      </p:sp>
+      <p:sp>
+        <p:nvSpPr>
+          <p:cNvPr id="25" name="visual-process-number-1"/>
+          <p:cNvSpPr txBox="1"/>
+          <p:nvPr/>
+        </p:nvSpPr>
+        <p:spPr>
+          <a:xfrm xmlns:a="http://schemas.openxmlformats.org/drawingml/2006/main">
+            <a:off x="1238250" y="4210050"/>
+            <a:ext cx="438150" cy="152400"/>
+          </a:xfrm>
+          <a:prstGeom xmlns:a="http://schemas.openxmlformats.org/drawingml/2006/main" prst="rect">
+            <a:avLst/>
+          </a:prstGeom>
+          <a:noFill xmlns:a="http://schemas.openxmlformats.org/drawingml/2006/main"/>
+          <a:ln xmlns:a="http://schemas.openxmlformats.org/drawingml/2006/main" w="0">
+            <a:noFill/>
+          </a:ln>
+        </p:spPr>
+        <p:txBody>
+          <a:bodyPr xmlns:a="http://schemas.openxmlformats.org/drawingml/2006/main" wrap="square" lIns="0" tIns="0" rIns="0" bIns="0" anchor="t"/>
+          <a:lstStyle xmlns:a="http://schemas.openxmlformats.org/drawingml/2006/main"/>
+          <a:p xmlns:a="http://schemas.openxmlformats.org/drawingml/2006/main">
+            <a:pPr algn="ctr"/>
+            <a:r>
+              <a:rPr lang="en-US" sz="900" b="1">
+                <a:solidFill>
+                  <a:srgbClr val="20BBD8"/>
+                </a:solidFill>
+                <a:latin typeface="Inter"/>
+                <a:ea typeface="Inter"/>
+              </a:rPr>
+              <a:t>02</a:t>
+            </a:r>
+            <a:endParaRPr lang="en-US"/>
+          </a:p>
+        </p:txBody>
+      </p:sp>
+      <p:sp>
+        <p:nvSpPr>
+          <p:cNvPr id="26" name="visual-process-label-1"/>
+          <p:cNvSpPr txBox="1"/>
+          <p:nvPr/>
+        </p:nvSpPr>
+        <p:spPr>
+          <a:xfrm xmlns:a="http://schemas.openxmlformats.org/drawingml/2006/main">
+            <a:off x="1943100" y="4114800"/>
+            <a:ext cx="1714500" cy="228600"/>
+          </a:xfrm>
+          <a:prstGeom xmlns:a="http://schemas.openxmlformats.org/drawingml/2006/main" prst="rect">
+            <a:avLst/>
+          </a:prstGeom>
+          <a:noFill xmlns:a="http://schemas.openxmlformats.org/drawingml/2006/main"/>
+          <a:ln xmlns:a="http://schemas.openxmlformats.org/drawingml/2006/main" w="0">
+            <a:noFill/>
+          </a:ln>
+        </p:spPr>
+        <p:txBody>
+          <a:bodyPr xmlns:a="http://schemas.openxmlformats.org/drawingml/2006/main" wrap="square" lIns="0" tIns="0" rIns="0" bIns="0" anchor="t"/>
+          <a:lstStyle xmlns:a="http://schemas.openxmlformats.org/drawingml/2006/main"/>
+          <a:p xmlns:a="http://schemas.openxmlformats.org/drawingml/2006/main">
+            <a:r>
+              <a:rPr lang="en-US" sz="1650" b="1">
+                <a:solidFill>
+                  <a:srgbClr val="F2F6F8"/>
+                </a:solidFill>
+                <a:latin typeface="Inter"/>
+                <a:ea typeface="Inter"/>
+              </a:rPr>
+              <a:t>Explain</a:t>
+            </a:r>
+            <a:endParaRPr lang="en-US"/>
+          </a:p>
+        </p:txBody>
+      </p:sp>
+      <p:sp>
+        <p:nvSpPr>
+          <p:cNvPr id="27" name="visual-process-text-1"/>
+          <p:cNvSpPr txBox="1"/>
+          <p:nvPr/>
+        </p:nvSpPr>
+        <p:spPr>
+          <a:xfrm xmlns:a="http://schemas.openxmlformats.org/drawingml/2006/main">
+            <a:off x="3829050" y="4143375"/>
+            <a:ext cx="2476500" cy="228600"/>
+          </a:xfrm>
+          <a:prstGeom xmlns:a="http://schemas.openxmlformats.org/drawingml/2006/main" prst="rect">
+            <a:avLst/>
+          </a:prstGeom>
+          <a:noFill xmlns:a="http://schemas.openxmlformats.org/drawingml/2006/main"/>
+          <a:ln xmlns:a="http://schemas.openxmlformats.org/drawingml/2006/main" w="0">
+            <a:noFill/>
+          </a:ln>
+        </p:spPr>
+        <p:txBody>
+          <a:bodyPr xmlns:a="http://schemas.openxmlformats.org/drawingml/2006/main" wrap="square" lIns="0" tIns="0" rIns="0" bIns="0" anchor="t"/>
+          <a:lstStyle xmlns:a="http://schemas.openxmlformats.org/drawingml/2006/main"/>
+          <a:p xmlns:a="http://schemas.openxmlformats.org/drawingml/2006/main">
+            <a:r>
+              <a:rPr lang="en-US" sz="1275">
+                <a:solidFill>
+                  <a:srgbClr val="787B7F"/>
+                </a:solidFill>
+                <a:latin typeface="Inter"/>
+                <a:ea typeface="Inter"/>
+              </a:rPr>
+              <a:t>Name the mechanism</a:t>
+            </a:r>
+            <a:endParaRPr lang="en-US"/>
+          </a:p>
+        </p:txBody>
+      </p:sp>
+      <p:sp>
+        <p:nvSpPr>
+          <p:cNvPr id="28" name="visual-process-node-2"/>
+          <p:cNvSpPr/>
+          <p:nvPr/>
+        </p:nvSpPr>
+        <p:spPr>
+          <a:xfrm xmlns:a="http://schemas.openxmlformats.org/drawingml/2006/main">
+            <a:off x="1257300" y="4838700"/>
+            <a:ext cx="400050" cy="400050"/>
+          </a:xfrm>
+          <a:prstGeom xmlns:a="http://schemas.openxmlformats.org/drawingml/2006/main" prst="ellipse">
+            <a:avLst/>
+          </a:prstGeom>
+          <a:solidFill xmlns:a="http://schemas.openxmlformats.org/drawingml/2006/main">
+            <a:srgbClr val="070A10"/>
+          </a:solidFill>
+          <a:ln xmlns:a="http://schemas.openxmlformats.org/drawingml/2006/main" w="38100">
+            <a:solidFill>
+              <a:srgbClr val="F2F6F8"/>
+            </a:solidFill>
+            <a:prstDash val="solid"/>
+          </a:ln>
+        </p:spPr>
+        <p:txBody>
+          <a:bodyPr xmlns:a="http://schemas.openxmlformats.org/drawingml/2006/main" wrap="square" lIns="0" tIns="0" rIns="0" bIns="0" anchor="t"/>
+          <a:lstStyle xmlns:a="http://schemas.openxmlformats.org/drawingml/2006/main"/>
+          <a:p xmlns:a="http://schemas.openxmlformats.org/drawingml/2006/main">
+            <a:r>
+              <a:rPr lang="en-US"/>
+              <a:t/>
+            </a:r>
+            <a:endParaRPr lang="en-US"/>
+          </a:p>
+        </p:txBody>
+      </p:sp>
+      <p:sp>
+        <p:nvSpPr>
+          <p:cNvPr id="29" name="visual-process-number-2"/>
+          <p:cNvSpPr txBox="1"/>
+          <p:nvPr/>
+        </p:nvSpPr>
+        <p:spPr>
+          <a:xfrm xmlns:a="http://schemas.openxmlformats.org/drawingml/2006/main">
+            <a:off x="1238250" y="4953000"/>
+            <a:ext cx="438150" cy="152400"/>
+          </a:xfrm>
+          <a:prstGeom xmlns:a="http://schemas.openxmlformats.org/drawingml/2006/main" prst="rect">
+            <a:avLst/>
+          </a:prstGeom>
+          <a:noFill xmlns:a="http://schemas.openxmlformats.org/drawingml/2006/main"/>
+          <a:ln xmlns:a="http://schemas.openxmlformats.org/drawingml/2006/main" w="0">
+            <a:noFill/>
+          </a:ln>
+        </p:spPr>
+        <p:txBody>
+          <a:bodyPr xmlns:a="http://schemas.openxmlformats.org/drawingml/2006/main" wrap="square" lIns="0" tIns="0" rIns="0" bIns="0" anchor="t"/>
+          <a:lstStyle xmlns:a="http://schemas.openxmlformats.org/drawingml/2006/main"/>
+          <a:p xmlns:a="http://schemas.openxmlformats.org/drawingml/2006/main">
+            <a:pPr algn="ctr"/>
+            <a:r>
+              <a:rPr lang="en-US" sz="900" b="1">
+                <a:solidFill>
+                  <a:srgbClr val="20BBD8"/>
+                </a:solidFill>
+                <a:latin typeface="Inter"/>
+                <a:ea typeface="Inter"/>
+              </a:rPr>
+              <a:t>03</a:t>
+            </a:r>
+            <a:endParaRPr lang="en-US"/>
+          </a:p>
+        </p:txBody>
+      </p:sp>
+      <p:sp>
+        <p:nvSpPr>
+          <p:cNvPr id="30" name="visual-process-label-2"/>
+          <p:cNvSpPr txBox="1"/>
+          <p:nvPr/>
+        </p:nvSpPr>
+        <p:spPr>
+          <a:xfrm xmlns:a="http://schemas.openxmlformats.org/drawingml/2006/main">
+            <a:off x="1943100" y="4857750"/>
+            <a:ext cx="1714500" cy="228600"/>
+          </a:xfrm>
+          <a:prstGeom xmlns:a="http://schemas.openxmlformats.org/drawingml/2006/main" prst="rect">
+            <a:avLst/>
+          </a:prstGeom>
+          <a:noFill xmlns:a="http://schemas.openxmlformats.org/drawingml/2006/main"/>
+          <a:ln xmlns:a="http://schemas.openxmlformats.org/drawingml/2006/main" w="0">
+            <a:noFill/>
+          </a:ln>
+        </p:spPr>
+        <p:txBody>
+          <a:bodyPr xmlns:a="http://schemas.openxmlformats.org/drawingml/2006/main" wrap="square" lIns="0" tIns="0" rIns="0" bIns="0" anchor="t"/>
+          <a:lstStyle xmlns:a="http://schemas.openxmlformats.org/drawingml/2006/main"/>
+          <a:p xmlns:a="http://schemas.openxmlformats.org/drawingml/2006/main">
+            <a:r>
+              <a:rPr lang="en-US" sz="1650" b="1">
+                <a:solidFill>
+                  <a:srgbClr val="F2F6F8"/>
+                </a:solidFill>
+                <a:latin typeface="Inter"/>
+                <a:ea typeface="Inter"/>
+              </a:rPr>
+              <a:t>Choose</a:t>
+            </a:r>
+            <a:endParaRPr lang="en-US"/>
+          </a:p>
+        </p:txBody>
+      </p:sp>
+      <p:sp>
+        <p:nvSpPr>
+          <p:cNvPr id="31" name="visual-process-text-2"/>
+          <p:cNvSpPr txBox="1"/>
+          <p:nvPr/>
+        </p:nvSpPr>
+        <p:spPr>
+          <a:xfrm xmlns:a="http://schemas.openxmlformats.org/drawingml/2006/main">
+            <a:off x="3829050" y="4886325"/>
+            <a:ext cx="2476500" cy="228600"/>
+          </a:xfrm>
+          <a:prstGeom xmlns:a="http://schemas.openxmlformats.org/drawingml/2006/main" prst="rect">
+            <a:avLst/>
+          </a:prstGeom>
+          <a:noFill xmlns:a="http://schemas.openxmlformats.org/drawingml/2006/main"/>
+          <a:ln xmlns:a="http://schemas.openxmlformats.org/drawingml/2006/main" w="0">
+            <a:noFill/>
+          </a:ln>
+        </p:spPr>
+        <p:txBody>
+          <a:bodyPr xmlns:a="http://schemas.openxmlformats.org/drawingml/2006/main" wrap="square" lIns="0" tIns="0" rIns="0" bIns="0" anchor="t"/>
+          <a:lstStyle xmlns:a="http://schemas.openxmlformats.org/drawingml/2006/main"/>
+          <a:p xmlns:a="http://schemas.openxmlformats.org/drawingml/2006/main">
+            <a:r>
+              <a:rPr lang="en-US" sz="1275">
+                <a:solidFill>
+                  <a:srgbClr val="787B7F"/>
+                </a:solidFill>
+                <a:latin typeface="Inter"/>
+                <a:ea typeface="Inter"/>
+              </a:rPr>
+              <a:t>Set the condition</a:t>
+            </a:r>
+            <a:endParaRPr lang="en-US"/>
+          </a:p>
+        </p:txBody>
+      </p:sp>
+      <p:sp>
+        <p:nvSpPr>
+          <p:cNvPr id="32" name="visual-process-node-3"/>
+          <p:cNvSpPr/>
+          <p:nvPr/>
+        </p:nvSpPr>
+        <p:spPr>
+          <a:xfrm xmlns:a="http://schemas.openxmlformats.org/drawingml/2006/main">
+            <a:off x="1257300" y="5581650"/>
+            <a:ext cx="400050" cy="400050"/>
+          </a:xfrm>
+          <a:prstGeom xmlns:a="http://schemas.openxmlformats.org/drawingml/2006/main" prst="ellipse">
+            <a:avLst/>
+          </a:prstGeom>
+          <a:solidFill xmlns:a="http://schemas.openxmlformats.org/drawingml/2006/main">
+            <a:srgbClr val="20BBD8"/>
+          </a:solidFill>
+          <a:ln xmlns:a="http://schemas.openxmlformats.org/drawingml/2006/main" w="38100">
+            <a:solidFill>
+              <a:srgbClr val="20BBD8"/>
+            </a:solidFill>
+            <a:prstDash val="solid"/>
+          </a:ln>
+        </p:spPr>
+        <p:txBody>
+          <a:bodyPr xmlns:a="http://schemas.openxmlformats.org/drawingml/2006/main" wrap="square" lIns="0" tIns="0" rIns="0" bIns="0" anchor="t"/>
+          <a:lstStyle xmlns:a="http://schemas.openxmlformats.org/drawingml/2006/main"/>
+          <a:p xmlns:a="http://schemas.openxmlformats.org/drawingml/2006/main">
+            <a:r>
+              <a:rPr lang="en-US"/>
+              <a:t/>
+            </a:r>
+            <a:endParaRPr lang="en-US"/>
+          </a:p>
+        </p:txBody>
+      </p:sp>
+      <p:sp>
+        <p:nvSpPr>
+          <p:cNvPr id="33" name="visual-process-number-3"/>
+          <p:cNvSpPr txBox="1"/>
+          <p:nvPr/>
+        </p:nvSpPr>
+        <p:spPr>
+          <a:xfrm xmlns:a="http://schemas.openxmlformats.org/drawingml/2006/main">
+            <a:off x="1238250" y="5695950"/>
+            <a:ext cx="438150" cy="152400"/>
+          </a:xfrm>
+          <a:prstGeom xmlns:a="http://schemas.openxmlformats.org/drawingml/2006/main" prst="rect">
+            <a:avLst/>
+          </a:prstGeom>
+          <a:noFill xmlns:a="http://schemas.openxmlformats.org/drawingml/2006/main"/>
+          <a:ln xmlns:a="http://schemas.openxmlformats.org/drawingml/2006/main" w="0">
+            <a:noFill/>
+          </a:ln>
+        </p:spPr>
+        <p:txBody>
+          <a:bodyPr xmlns:a="http://schemas.openxmlformats.org/drawingml/2006/main" wrap="square" lIns="0" tIns="0" rIns="0" bIns="0" anchor="t"/>
+          <a:lstStyle xmlns:a="http://schemas.openxmlformats.org/drawingml/2006/main"/>
+          <a:p xmlns:a="http://schemas.openxmlformats.org/drawingml/2006/main">
+            <a:pPr algn="ctr"/>
+            <a:r>
+              <a:rPr lang="en-US" sz="900" b="1">
+                <a:solidFill>
+                  <a:srgbClr val="202124"/>
+                </a:solidFill>
+                <a:latin typeface="Inter"/>
+                <a:ea typeface="Inter"/>
+              </a:rPr>
+              <a:t>04</a:t>
+            </a:r>
+            <a:endParaRPr lang="en-US"/>
+          </a:p>
+        </p:txBody>
+      </p:sp>
+      <p:sp>
+        <p:nvSpPr>
+          <p:cNvPr id="34" name="visual-process-label-3"/>
+          <p:cNvSpPr txBox="1"/>
+          <p:nvPr/>
+        </p:nvSpPr>
+        <p:spPr>
+          <a:xfrm xmlns:a="http://schemas.openxmlformats.org/drawingml/2006/main">
+            <a:off x="1943100" y="5600700"/>
+            <a:ext cx="1714500" cy="228600"/>
+          </a:xfrm>
+          <a:prstGeom xmlns:a="http://schemas.openxmlformats.org/drawingml/2006/main" prst="rect">
+            <a:avLst/>
+          </a:prstGeom>
+          <a:noFill xmlns:a="http://schemas.openxmlformats.org/drawingml/2006/main"/>
+          <a:ln xmlns:a="http://schemas.openxmlformats.org/drawingml/2006/main" w="0">
+            <a:noFill/>
+          </a:ln>
+        </p:spPr>
+        <p:txBody>
+          <a:bodyPr xmlns:a="http://schemas.openxmlformats.org/drawingml/2006/main" wrap="square" lIns="0" tIns="0" rIns="0" bIns="0" anchor="t"/>
+          <a:lstStyle xmlns:a="http://schemas.openxmlformats.org/drawingml/2006/main"/>
+          <a:p xmlns:a="http://schemas.openxmlformats.org/drawingml/2006/main">
+            <a:r>
+              <a:rPr lang="en-US" sz="1650" b="1">
+                <a:solidFill>
+                  <a:srgbClr val="F2F6F8"/>
+                </a:solidFill>
+                <a:latin typeface="Inter"/>
+                <a:ea typeface="Inter"/>
+              </a:rPr>
+              <a:t>Act</a:t>
+            </a:r>
+            <a:endParaRPr lang="en-US"/>
+          </a:p>
+        </p:txBody>
+      </p:sp>
+      <p:sp>
+        <p:nvSpPr>
+          <p:cNvPr id="35" name="visual-process-text-3"/>
+          <p:cNvSpPr txBox="1"/>
+          <p:nvPr/>
+        </p:nvSpPr>
+        <p:spPr>
+          <a:xfrm xmlns:a="http://schemas.openxmlformats.org/drawingml/2006/main">
+            <a:off x="3829050" y="5629275"/>
+            <a:ext cx="2476500" cy="228600"/>
+          </a:xfrm>
+          <a:prstGeom xmlns:a="http://schemas.openxmlformats.org/drawingml/2006/main" prst="rect">
+            <a:avLst/>
+          </a:prstGeom>
+          <a:noFill xmlns:a="http://schemas.openxmlformats.org/drawingml/2006/main"/>
+          <a:ln xmlns:a="http://schemas.openxmlformats.org/drawingml/2006/main" w="0">
+            <a:noFill/>
+          </a:ln>
+        </p:spPr>
+        <p:txBody>
+          <a:bodyPr xmlns:a="http://schemas.openxmlformats.org/drawingml/2006/main" wrap="square" lIns="0" tIns="0" rIns="0" bIns="0" anchor="t"/>
+          <a:lstStyle xmlns:a="http://schemas.openxmlformats.org/drawingml/2006/main"/>
+          <a:p xmlns:a="http://schemas.openxmlformats.org/drawingml/2006/main">
+            <a:r>
+              <a:rPr lang="en-US" sz="1275">
+                <a:solidFill>
+                  <a:srgbClr val="787B7F"/>
+                </a:solidFill>
+                <a:latin typeface="Inter"/>
+                <a:ea typeface="Inter"/>
+              </a:rPr>
+              <a:t>Return with proof</a:t>
+            </a:r>
+            <a:endParaRPr lang="en-US"/>
+          </a:p>
+        </p:txBody>
+      </p:sp>
+      <p:sp>
+        <p:nvSpPr>
+          <p:cNvPr id="36" name="visual-process-rule"/>
+          <p:cNvSpPr/>
+          <p:nvPr/>
+        </p:nvSpPr>
+        <p:spPr>
+          <a:xfrm xmlns:a="http://schemas.openxmlformats.org/drawingml/2006/main">
+            <a:off x="7239000" y="3486150"/>
+            <a:ext cx="0" cy="2705100"/>
+          </a:xfrm>
+          <a:prstGeom xmlns:a="http://schemas.openxmlformats.org/drawingml/2006/main" prst="line">
+            <a:avLst/>
+          </a:prstGeom>
+          <a:noFill xmlns:a="http://schemas.openxmlformats.org/drawingml/2006/main"/>
+          <a:ln xmlns:a="http://schemas.openxmlformats.org/drawingml/2006/main" w="12700">
+            <a:solidFill>
+              <a:srgbClr val="787B7F"/>
+            </a:solidFill>
+            <a:prstDash val="solid"/>
+          </a:ln>
+        </p:spPr>
+        <p:txBody>
+          <a:bodyPr xmlns:a="http://schemas.openxmlformats.org/drawingml/2006/main" wrap="square" lIns="0" tIns="0" rIns="0" bIns="0" anchor="t"/>
+          <a:lstStyle xmlns:a="http://schemas.openxmlformats.org/drawingml/2006/main"/>
+          <a:p xmlns:a="http://schemas.openxmlformats.org/drawingml/2006/main">
+            <a:r>
+              <a:rPr lang="en-US"/>
+              <a:t/>
+            </a:r>
+            <a:endParaRPr lang="en-US"/>
+          </a:p>
+        </p:txBody>
+      </p:sp>
+      <p:sp>
+        <p:nvSpPr>
+          <p:cNvPr id="37" name="visual-process-note-label"/>
+          <p:cNvSpPr txBox="1"/>
+          <p:nvPr/>
+        </p:nvSpPr>
+        <p:spPr>
+          <a:xfrm xmlns:a="http://schemas.openxmlformats.org/drawingml/2006/main">
+            <a:off x="8001000" y="3562350"/>
+            <a:ext cx="3429000" cy="228600"/>
+          </a:xfrm>
+          <a:prstGeom xmlns:a="http://schemas.openxmlformats.org/drawingml/2006/main" prst="rect">
+            <a:avLst/>
+          </a:prstGeom>
+          <a:noFill xmlns:a="http://schemas.openxmlformats.org/drawingml/2006/main"/>
+          <a:ln xmlns:a="http://schemas.openxmlformats.org/drawingml/2006/main" w="0">
+            <a:noFill/>
+          </a:ln>
+        </p:spPr>
+        <p:txBody>
+          <a:bodyPr xmlns:a="http://schemas.openxmlformats.org/drawingml/2006/main" wrap="square" lIns="0" tIns="0" rIns="0" bIns="0" anchor="t"/>
+          <a:lstStyle xmlns:a="http://schemas.openxmlformats.org/drawingml/2006/main"/>
+          <a:p xmlns:a="http://schemas.openxmlformats.org/drawingml/2006/main">
+            <a:r>
+              <a:rPr lang="en-US" sz="1125" b="1">
+                <a:solidFill>
+                  <a:srgbClr val="20BBD8"/>
+                </a:solidFill>
+                <a:latin typeface="Inter"/>
+                <a:ea typeface="Inter"/>
+              </a:rPr>
+              <a:t>PROCESS CARRIER</a:t>
+            </a:r>
+            <a:endParaRPr lang="en-US"/>
+          </a:p>
+        </p:txBody>
+      </p:sp>
+      <p:sp>
+        <p:nvSpPr>
+          <p:cNvPr id="38" name="visual-process-note-title"/>
+          <p:cNvSpPr txBox="1"/>
+          <p:nvPr/>
+        </p:nvSpPr>
+        <p:spPr>
+          <a:xfrm xmlns:a="http://schemas.openxmlformats.org/drawingml/2006/main">
+            <a:off x="8001000" y="4038600"/>
+            <a:ext cx="4381500" cy="685800"/>
+          </a:xfrm>
+          <a:prstGeom xmlns:a="http://schemas.openxmlformats.org/drawingml/2006/main" prst="rect">
+            <a:avLst/>
+          </a:prstGeom>
+          <a:noFill xmlns:a="http://schemas.openxmlformats.org/drawingml/2006/main"/>
+          <a:ln xmlns:a="http://schemas.openxmlformats.org/drawingml/2006/main" w="0">
+            <a:noFill/>
+          </a:ln>
+        </p:spPr>
+        <p:txBody>
+          <a:bodyPr xmlns:a="http://schemas.openxmlformats.org/drawingml/2006/main" wrap="square" lIns="0" tIns="0" rIns="0" bIns="0" anchor="t"/>
+          <a:lstStyle xmlns:a="http://schemas.openxmlformats.org/drawingml/2006/main"/>
+          <a:p xmlns:a="http://schemas.openxmlformats.org/drawingml/2006/main">
+            <a:r>
+              <a:rPr lang="en-US" sz="2250" b="1">
+                <a:solidFill>
+                  <a:srgbClr val="F2F6F8"/>
+                </a:solidFill>
+                <a:latin typeface="Inter"/>
+                <a:ea typeface="Inter"/>
+              </a:rPr>
+              <a:t>A relationship earns a line.</a:t>
+            </a:r>
+            <a:endParaRPr lang="en-US"/>
+          </a:p>
+        </p:txBody>
+      </p:sp>
+      <p:sp>
+        <p:nvSpPr>
+          <p:cNvPr id="39" name="visual-process-note-body"/>
+          <p:cNvSpPr txBox="1"/>
+          <p:nvPr/>
+        </p:nvSpPr>
+        <p:spPr>
+          <a:xfrm xmlns:a="http://schemas.openxmlformats.org/drawingml/2006/main">
+            <a:off x="8001000" y="5048250"/>
+            <a:ext cx="4572000" cy="685800"/>
+          </a:xfrm>
+          <a:prstGeom xmlns:a="http://schemas.openxmlformats.org/drawingml/2006/main" prst="rect">
+            <a:avLst/>
+          </a:prstGeom>
+          <a:noFill xmlns:a="http://schemas.openxmlformats.org/drawingml/2006/main"/>
+          <a:ln xmlns:a="http://schemas.openxmlformats.org/drawingml/2006/main" w="0">
+            <a:noFill/>
+          </a:ln>
+        </p:spPr>
+        <p:txBody>
+          <a:bodyPr xmlns:a="http://schemas.openxmlformats.org/drawingml/2006/main" wrap="square" lIns="0" tIns="0" rIns="0" bIns="0" anchor="t"/>
+          <a:lstStyle xmlns:a="http://schemas.openxmlformats.org/drawingml/2006/main"/>
+          <a:p xmlns:a="http://schemas.openxmlformats.org/drawingml/2006/main">
+            <a:r>
+              <a:rPr lang="en-US" sz="1275">
+                <a:solidFill>
+                  <a:srgbClr val="787B7F"/>
+                </a:solidFill>
+                <a:latin typeface="Inter"/>
+                <a:ea typeface="Inter"/>
+              </a:rPr>
+              <a:t>Use sequence, direction and conditions to make the mechanism visible. If the relationship is not real, remove the arrow.</a:t>
+            </a:r>
+            <a:endParaRPr lang="en-US"/>
+          </a:p>
+        </p:txBody>
+      </p:sp>
+      <p:sp>
+        <p:nvSpPr>
+          <p:cNvPr id="40" name="visual-note"/>
           <p:cNvSpPr/>
           <p:nvPr/>
         </p:nvSpPr>
@@ -6127,7 +7071,7 @@
       </p:sp>
       <p:sp>
         <p:nvSpPr>
-          <p:cNvPr id="22" name="visual-note-label"/>
+          <p:cNvPr id="41" name="visual-note-label"/>
           <p:cNvSpPr txBox="1"/>
           <p:nvPr/>
         </p:nvSpPr>
@@ -6164,7 +7108,7 @@
       </p:sp>
       <p:sp>
         <p:nvSpPr>
-          <p:cNvPr id="23" name="visual-note-text"/>
+          <p:cNvPr id="42" name="visual-note-text"/>
           <p:cNvSpPr txBox="1"/>
           <p:nvPr/>
         </p:nvSpPr>
@@ -6201,7 +7145,7 @@
       </p:sp>
       <p:sp>
         <p:nvSpPr>
-          <p:cNvPr id="24" name="visual-note-foot"/>
+          <p:cNvPr id="43" name="visual-note-foot"/>
           <p:cNvSpPr txBox="1"/>
           <p:nvPr/>
         </p:nvSpPr>
@@ -6238,7 +7182,7 @@
       </p:sp>
       <p:sp>
         <p:nvSpPr>
-          <p:cNvPr id="25" name="source"/>
+          <p:cNvPr id="44" name="source"/>
           <p:cNvSpPr txBox="1"/>
           <p:nvPr/>
         </p:nvSpPr>
@@ -6275,7 +7219,7 @@
       </p:sp>
       <p:sp>
         <p:nvSpPr>
-          <p:cNvPr id="26" name="page-number"/>
+          <p:cNvPr id="45" name="page-number"/>
           <p:cNvSpPr txBox="1"/>
           <p:nvPr/>
         </p:nvSpPr>

--- a/skills/presentation-template-library/skills/artifact-template-blue-flame-operations/assets/reference.pptx
+++ b/skills/presentation-template-library/skills/artifact-template-blue-flame-operations/assets/reference.pptx
@@ -197,16 +197,6 @@
 <file path=ppt/slides/slide1.xml><?xml version="1.0" encoding="utf-8"?>
 <p:sld xmlns:p="http://schemas.openxmlformats.org/presentationml/2006/main">
   <p:cSld name="Opening claim">
-    <p:bg>
-      <p:bgPr>
-        <a:blipFill xmlns:a="http://schemas.openxmlformats.org/drawingml/2006/main">
-          <a:blip xmlns:r="http://schemas.openxmlformats.org/officeDocument/2006/relationships" r:embed="rIdOfficeKitImageb5a7d66fe0ba8bb7_1"/>
-          <a:stretch>
-            <a:fillRect/>
-          </a:stretch>
-        </a:blipFill>
-      </p:bgPr>
-    </p:bg>
     <p:spTree>
       <p:nvGrpSpPr>
         <p:cNvPr id="1" name=""/>
@@ -223,22 +213,20 @@
       </p:grpSpPr>
       <p:sp>
         <p:nvSpPr>
-          <p:cNvPr id="2" name="cover-paper-scrim"/>
+          <p:cNvPr id="2" name="blue-flame-cover-field"/>
           <p:cNvSpPr/>
           <p:nvPr/>
         </p:nvSpPr>
         <p:spPr>
           <a:xfrm xmlns:a="http://schemas.openxmlformats.org/drawingml/2006/main">
             <a:off x="0" y="0"/>
-            <a:ext cx="9525000" cy="8572500"/>
+            <a:ext cx="15240000" cy="8572500"/>
           </a:xfrm>
           <a:prstGeom xmlns:a="http://schemas.openxmlformats.org/drawingml/2006/main" prst="rect">
             <a:avLst/>
           </a:prstGeom>
           <a:solidFill xmlns:a="http://schemas.openxmlformats.org/drawingml/2006/main">
-            <a:srgbClr val="070A10">
-              <a:alpha val="100000"/>
-            </a:srgbClr>
+            <a:srgbClr val="070A10"/>
           </a:solidFill>
           <a:ln xmlns:a="http://schemas.openxmlformats.org/drawingml/2006/main" w="0">
             <a:solidFill>
@@ -261,420 +249,14 @@
       </p:sp>
       <p:sp>
         <p:nvSpPr>
-          <p:cNvPr id="3" name="fixed-rail"/>
+          <p:cNvPr id="3" name="blue-flame-cover-top-rule"/>
           <p:cNvSpPr/>
           <p:nvPr/>
         </p:nvSpPr>
         <p:spPr>
           <a:xfrm xmlns:a="http://schemas.openxmlformats.org/drawingml/2006/main">
-            <a:off x="323850" y="0"/>
-            <a:ext cx="114300" cy="8572500"/>
-          </a:xfrm>
-          <a:prstGeom xmlns:a="http://schemas.openxmlformats.org/drawingml/2006/main" prst="rect">
-            <a:avLst/>
-          </a:prstGeom>
-          <a:solidFill xmlns:a="http://schemas.openxmlformats.org/drawingml/2006/main">
-            <a:srgbClr val="20BBD8"/>
-          </a:solidFill>
-          <a:ln xmlns:a="http://schemas.openxmlformats.org/drawingml/2006/main" w="0">
-            <a:solidFill>
-              <a:srgbClr val="20BBD8"/>
-            </a:solidFill>
-            <a:prstDash val="solid"/>
-          </a:ln>
-        </p:spPr>
-        <p:txBody>
-          <a:bodyPr xmlns:a="http://schemas.openxmlformats.org/drawingml/2006/main" wrap="square" lIns="0" tIns="0" rIns="0" bIns="0" anchor="t"/>
-          <a:lstStyle xmlns:a="http://schemas.openxmlformats.org/drawingml/2006/main"/>
-          <a:p xmlns:a="http://schemas.openxmlformats.org/drawingml/2006/main">
-            <a:r>
-              <a:rPr lang="en-US"/>
-              <a:t/>
-            </a:r>
-            <a:endParaRPr lang="en-US"/>
-          </a:p>
-        </p:txBody>
-      </p:sp>
-      <p:sp>
-        <p:nvSpPr>
-          <p:cNvPr id="4" name="fixed-nav-0"/>
-          <p:cNvSpPr/>
-          <p:nvPr/>
-        </p:nvSpPr>
-        <p:spPr>
-          <a:xfrm xmlns:a="http://schemas.openxmlformats.org/drawingml/2006/main">
-            <a:off x="914400" y="4210050"/>
-            <a:ext cx="1516380" cy="209550"/>
-          </a:xfrm>
-          <a:prstGeom xmlns:a="http://schemas.openxmlformats.org/drawingml/2006/main" prst="rect">
-            <a:avLst/>
-          </a:prstGeom>
-          <a:solidFill xmlns:a="http://schemas.openxmlformats.org/drawingml/2006/main">
-            <a:srgbClr val="F2F6F8"/>
-          </a:solidFill>
-          <a:ln xmlns:a="http://schemas.openxmlformats.org/drawingml/2006/main" w="0">
-            <a:solidFill>
-              <a:srgbClr val="F2F6F8"/>
-            </a:solidFill>
-            <a:prstDash val="solid"/>
-          </a:ln>
-        </p:spPr>
-        <p:txBody>
-          <a:bodyPr xmlns:a="http://schemas.openxmlformats.org/drawingml/2006/main" wrap="square" lIns="0" tIns="0" rIns="0" bIns="0" anchor="t"/>
-          <a:lstStyle xmlns:a="http://schemas.openxmlformats.org/drawingml/2006/main"/>
-          <a:p xmlns:a="http://schemas.openxmlformats.org/drawingml/2006/main">
-            <a:r>
-              <a:rPr lang="en-US"/>
-              <a:t/>
-            </a:r>
-            <a:endParaRPr lang="en-US"/>
-          </a:p>
-        </p:txBody>
-      </p:sp>
-      <p:sp>
-        <p:nvSpPr>
-          <p:cNvPr id="5" name="fixed-nav-label-0"/>
-          <p:cNvSpPr txBox="1"/>
-          <p:nvPr/>
-        </p:nvSpPr>
-        <p:spPr>
-          <a:xfrm xmlns:a="http://schemas.openxmlformats.org/drawingml/2006/main">
-            <a:off x="990600" y="4248150"/>
-            <a:ext cx="1363980" cy="133350"/>
-          </a:xfrm>
-          <a:prstGeom xmlns:a="http://schemas.openxmlformats.org/drawingml/2006/main" prst="rect">
-            <a:avLst/>
-          </a:prstGeom>
-          <a:noFill xmlns:a="http://schemas.openxmlformats.org/drawingml/2006/main"/>
-          <a:ln xmlns:a="http://schemas.openxmlformats.org/drawingml/2006/main" w="0">
-            <a:noFill/>
-          </a:ln>
-        </p:spPr>
-        <p:txBody>
-          <a:bodyPr xmlns:a="http://schemas.openxmlformats.org/drawingml/2006/main" wrap="square" lIns="0" tIns="0" rIns="0" bIns="0" anchor="t"/>
-          <a:lstStyle xmlns:a="http://schemas.openxmlformats.org/drawingml/2006/main"/>
-          <a:p xmlns:a="http://schemas.openxmlformats.org/drawingml/2006/main">
-            <a:pPr algn="ctr"/>
-            <a:r>
-              <a:rPr lang="en-US" sz="675" b="1">
-                <a:solidFill>
-                  <a:srgbClr val="202124"/>
-                </a:solidFill>
-                <a:latin typeface="Inter"/>
-                <a:ea typeface="Inter"/>
-              </a:rPr>
-              <a:t>BRIEF</a:t>
-            </a:r>
-            <a:endParaRPr lang="en-US"/>
-          </a:p>
-        </p:txBody>
-      </p:sp>
-      <p:sp>
-        <p:nvSpPr>
-          <p:cNvPr id="6" name="fixed-nav-1"/>
-          <p:cNvSpPr/>
-          <p:nvPr/>
-        </p:nvSpPr>
-        <p:spPr>
-          <a:xfrm xmlns:a="http://schemas.openxmlformats.org/drawingml/2006/main">
-            <a:off x="2487930" y="4210050"/>
-            <a:ext cx="1516380" cy="209550"/>
-          </a:xfrm>
-          <a:prstGeom xmlns:a="http://schemas.openxmlformats.org/drawingml/2006/main" prst="rect">
-            <a:avLst/>
-          </a:prstGeom>
-          <a:solidFill xmlns:a="http://schemas.openxmlformats.org/drawingml/2006/main">
-            <a:srgbClr val="131A24"/>
-          </a:solidFill>
-          <a:ln xmlns:a="http://schemas.openxmlformats.org/drawingml/2006/main" w="0">
-            <a:solidFill>
-              <a:srgbClr val="131A24"/>
-            </a:solidFill>
-            <a:prstDash val="solid"/>
-          </a:ln>
-        </p:spPr>
-        <p:txBody>
-          <a:bodyPr xmlns:a="http://schemas.openxmlformats.org/drawingml/2006/main" wrap="square" lIns="0" tIns="0" rIns="0" bIns="0" anchor="t"/>
-          <a:lstStyle xmlns:a="http://schemas.openxmlformats.org/drawingml/2006/main"/>
-          <a:p xmlns:a="http://schemas.openxmlformats.org/drawingml/2006/main">
-            <a:r>
-              <a:rPr lang="en-US"/>
-              <a:t/>
-            </a:r>
-            <a:endParaRPr lang="en-US"/>
-          </a:p>
-        </p:txBody>
-      </p:sp>
-      <p:sp>
-        <p:nvSpPr>
-          <p:cNvPr id="7" name="fixed-nav-label-1"/>
-          <p:cNvSpPr txBox="1"/>
-          <p:nvPr/>
-        </p:nvSpPr>
-        <p:spPr>
-          <a:xfrm xmlns:a="http://schemas.openxmlformats.org/drawingml/2006/main">
-            <a:off x="2564130" y="4248150"/>
-            <a:ext cx="1363980" cy="133350"/>
-          </a:xfrm>
-          <a:prstGeom xmlns:a="http://schemas.openxmlformats.org/drawingml/2006/main" prst="rect">
-            <a:avLst/>
-          </a:prstGeom>
-          <a:noFill xmlns:a="http://schemas.openxmlformats.org/drawingml/2006/main"/>
-          <a:ln xmlns:a="http://schemas.openxmlformats.org/drawingml/2006/main" w="0">
-            <a:noFill/>
-          </a:ln>
-        </p:spPr>
-        <p:txBody>
-          <a:bodyPr xmlns:a="http://schemas.openxmlformats.org/drawingml/2006/main" wrap="square" lIns="0" tIns="0" rIns="0" bIns="0" anchor="t"/>
-          <a:lstStyle xmlns:a="http://schemas.openxmlformats.org/drawingml/2006/main"/>
-          <a:p xmlns:a="http://schemas.openxmlformats.org/drawingml/2006/main">
-            <a:pPr algn="ctr"/>
-            <a:r>
-              <a:rPr lang="en-US" sz="675" b="1">
-                <a:solidFill>
-                  <a:srgbClr val="787B7F"/>
-                </a:solidFill>
-                <a:latin typeface="Inter"/>
-                <a:ea typeface="Inter"/>
-              </a:rPr>
-              <a:t>SIGNAL</a:t>
-            </a:r>
-            <a:endParaRPr lang="en-US"/>
-          </a:p>
-        </p:txBody>
-      </p:sp>
-      <p:sp>
-        <p:nvSpPr>
-          <p:cNvPr id="8" name="fixed-nav-2"/>
-          <p:cNvSpPr/>
-          <p:nvPr/>
-        </p:nvSpPr>
-        <p:spPr>
-          <a:xfrm xmlns:a="http://schemas.openxmlformats.org/drawingml/2006/main">
-            <a:off x="4061460" y="4210050"/>
-            <a:ext cx="1516380" cy="209550"/>
-          </a:xfrm>
-          <a:prstGeom xmlns:a="http://schemas.openxmlformats.org/drawingml/2006/main" prst="rect">
-            <a:avLst/>
-          </a:prstGeom>
-          <a:solidFill xmlns:a="http://schemas.openxmlformats.org/drawingml/2006/main">
-            <a:srgbClr val="131A24"/>
-          </a:solidFill>
-          <a:ln xmlns:a="http://schemas.openxmlformats.org/drawingml/2006/main" w="0">
-            <a:solidFill>
-              <a:srgbClr val="131A24"/>
-            </a:solidFill>
-            <a:prstDash val="solid"/>
-          </a:ln>
-        </p:spPr>
-        <p:txBody>
-          <a:bodyPr xmlns:a="http://schemas.openxmlformats.org/drawingml/2006/main" wrap="square" lIns="0" tIns="0" rIns="0" bIns="0" anchor="t"/>
-          <a:lstStyle xmlns:a="http://schemas.openxmlformats.org/drawingml/2006/main"/>
-          <a:p xmlns:a="http://schemas.openxmlformats.org/drawingml/2006/main">
-            <a:r>
-              <a:rPr lang="en-US"/>
-              <a:t/>
-            </a:r>
-            <a:endParaRPr lang="en-US"/>
-          </a:p>
-        </p:txBody>
-      </p:sp>
-      <p:sp>
-        <p:nvSpPr>
-          <p:cNvPr id="9" name="fixed-nav-label-2"/>
-          <p:cNvSpPr txBox="1"/>
-          <p:nvPr/>
-        </p:nvSpPr>
-        <p:spPr>
-          <a:xfrm xmlns:a="http://schemas.openxmlformats.org/drawingml/2006/main">
-            <a:off x="4137660" y="4248150"/>
-            <a:ext cx="1363980" cy="133350"/>
-          </a:xfrm>
-          <a:prstGeom xmlns:a="http://schemas.openxmlformats.org/drawingml/2006/main" prst="rect">
-            <a:avLst/>
-          </a:prstGeom>
-          <a:noFill xmlns:a="http://schemas.openxmlformats.org/drawingml/2006/main"/>
-          <a:ln xmlns:a="http://schemas.openxmlformats.org/drawingml/2006/main" w="0">
-            <a:noFill/>
-          </a:ln>
-        </p:spPr>
-        <p:txBody>
-          <a:bodyPr xmlns:a="http://schemas.openxmlformats.org/drawingml/2006/main" wrap="square" lIns="0" tIns="0" rIns="0" bIns="0" anchor="t"/>
-          <a:lstStyle xmlns:a="http://schemas.openxmlformats.org/drawingml/2006/main"/>
-          <a:p xmlns:a="http://schemas.openxmlformats.org/drawingml/2006/main">
-            <a:pPr algn="ctr"/>
-            <a:r>
-              <a:rPr lang="en-US" sz="675" b="1">
-                <a:solidFill>
-                  <a:srgbClr val="787B7F"/>
-                </a:solidFill>
-                <a:latin typeface="Inter"/>
-                <a:ea typeface="Inter"/>
-              </a:rPr>
-              <a:t>EVIDENCE</a:t>
-            </a:r>
-            <a:endParaRPr lang="en-US"/>
-          </a:p>
-        </p:txBody>
-      </p:sp>
-      <p:sp>
-        <p:nvSpPr>
-          <p:cNvPr id="10" name="fixed-nav-3"/>
-          <p:cNvSpPr/>
-          <p:nvPr/>
-        </p:nvSpPr>
-        <p:spPr>
-          <a:xfrm xmlns:a="http://schemas.openxmlformats.org/drawingml/2006/main">
-            <a:off x="5634990" y="4210050"/>
-            <a:ext cx="1516380" cy="209550"/>
-          </a:xfrm>
-          <a:prstGeom xmlns:a="http://schemas.openxmlformats.org/drawingml/2006/main" prst="rect">
-            <a:avLst/>
-          </a:prstGeom>
-          <a:solidFill xmlns:a="http://schemas.openxmlformats.org/drawingml/2006/main">
-            <a:srgbClr val="131A24"/>
-          </a:solidFill>
-          <a:ln xmlns:a="http://schemas.openxmlformats.org/drawingml/2006/main" w="0">
-            <a:solidFill>
-              <a:srgbClr val="131A24"/>
-            </a:solidFill>
-            <a:prstDash val="solid"/>
-          </a:ln>
-        </p:spPr>
-        <p:txBody>
-          <a:bodyPr xmlns:a="http://schemas.openxmlformats.org/drawingml/2006/main" wrap="square" lIns="0" tIns="0" rIns="0" bIns="0" anchor="t"/>
-          <a:lstStyle xmlns:a="http://schemas.openxmlformats.org/drawingml/2006/main"/>
-          <a:p xmlns:a="http://schemas.openxmlformats.org/drawingml/2006/main">
-            <a:r>
-              <a:rPr lang="en-US"/>
-              <a:t/>
-            </a:r>
-            <a:endParaRPr lang="en-US"/>
-          </a:p>
-        </p:txBody>
-      </p:sp>
-      <p:sp>
-        <p:nvSpPr>
-          <p:cNvPr id="11" name="fixed-nav-label-3"/>
-          <p:cNvSpPr txBox="1"/>
-          <p:nvPr/>
-        </p:nvSpPr>
-        <p:spPr>
-          <a:xfrm xmlns:a="http://schemas.openxmlformats.org/drawingml/2006/main">
-            <a:off x="5711190" y="4248150"/>
-            <a:ext cx="1363980" cy="133350"/>
-          </a:xfrm>
-          <a:prstGeom xmlns:a="http://schemas.openxmlformats.org/drawingml/2006/main" prst="rect">
-            <a:avLst/>
-          </a:prstGeom>
-          <a:noFill xmlns:a="http://schemas.openxmlformats.org/drawingml/2006/main"/>
-          <a:ln xmlns:a="http://schemas.openxmlformats.org/drawingml/2006/main" w="0">
-            <a:noFill/>
-          </a:ln>
-        </p:spPr>
-        <p:txBody>
-          <a:bodyPr xmlns:a="http://schemas.openxmlformats.org/drawingml/2006/main" wrap="square" lIns="0" tIns="0" rIns="0" bIns="0" anchor="t"/>
-          <a:lstStyle xmlns:a="http://schemas.openxmlformats.org/drawingml/2006/main"/>
-          <a:p xmlns:a="http://schemas.openxmlformats.org/drawingml/2006/main">
-            <a:pPr algn="ctr"/>
-            <a:r>
-              <a:rPr lang="en-US" sz="675" b="1">
-                <a:solidFill>
-                  <a:srgbClr val="787B7F"/>
-                </a:solidFill>
-                <a:latin typeface="Inter"/>
-                <a:ea typeface="Inter"/>
-              </a:rPr>
-              <a:t>CHOICE</a:t>
-            </a:r>
-            <a:endParaRPr lang="en-US"/>
-          </a:p>
-        </p:txBody>
-      </p:sp>
-      <p:sp>
-        <p:nvSpPr>
-          <p:cNvPr id="12" name="fixed-nav-4"/>
-          <p:cNvSpPr/>
-          <p:nvPr/>
-        </p:nvSpPr>
-        <p:spPr>
-          <a:xfrm xmlns:a="http://schemas.openxmlformats.org/drawingml/2006/main">
-            <a:off x="7208520" y="4210050"/>
-            <a:ext cx="1516380" cy="209550"/>
-          </a:xfrm>
-          <a:prstGeom xmlns:a="http://schemas.openxmlformats.org/drawingml/2006/main" prst="rect">
-            <a:avLst/>
-          </a:prstGeom>
-          <a:solidFill xmlns:a="http://schemas.openxmlformats.org/drawingml/2006/main">
-            <a:srgbClr val="131A24"/>
-          </a:solidFill>
-          <a:ln xmlns:a="http://schemas.openxmlformats.org/drawingml/2006/main" w="0">
-            <a:solidFill>
-              <a:srgbClr val="131A24"/>
-            </a:solidFill>
-            <a:prstDash val="solid"/>
-          </a:ln>
-        </p:spPr>
-        <p:txBody>
-          <a:bodyPr xmlns:a="http://schemas.openxmlformats.org/drawingml/2006/main" wrap="square" lIns="0" tIns="0" rIns="0" bIns="0" anchor="t"/>
-          <a:lstStyle xmlns:a="http://schemas.openxmlformats.org/drawingml/2006/main"/>
-          <a:p xmlns:a="http://schemas.openxmlformats.org/drawingml/2006/main">
-            <a:r>
-              <a:rPr lang="en-US"/>
-              <a:t/>
-            </a:r>
-            <a:endParaRPr lang="en-US"/>
-          </a:p>
-        </p:txBody>
-      </p:sp>
-      <p:sp>
-        <p:nvSpPr>
-          <p:cNvPr id="13" name="fixed-nav-label-4"/>
-          <p:cNvSpPr txBox="1"/>
-          <p:nvPr/>
-        </p:nvSpPr>
-        <p:spPr>
-          <a:xfrm xmlns:a="http://schemas.openxmlformats.org/drawingml/2006/main">
-            <a:off x="7284720" y="4248150"/>
-            <a:ext cx="1363980" cy="133350"/>
-          </a:xfrm>
-          <a:prstGeom xmlns:a="http://schemas.openxmlformats.org/drawingml/2006/main" prst="rect">
-            <a:avLst/>
-          </a:prstGeom>
-          <a:noFill xmlns:a="http://schemas.openxmlformats.org/drawingml/2006/main"/>
-          <a:ln xmlns:a="http://schemas.openxmlformats.org/drawingml/2006/main" w="0">
-            <a:noFill/>
-          </a:ln>
-        </p:spPr>
-        <p:txBody>
-          <a:bodyPr xmlns:a="http://schemas.openxmlformats.org/drawingml/2006/main" wrap="square" lIns="0" tIns="0" rIns="0" bIns="0" anchor="t"/>
-          <a:lstStyle xmlns:a="http://schemas.openxmlformats.org/drawingml/2006/main"/>
-          <a:p xmlns:a="http://schemas.openxmlformats.org/drawingml/2006/main">
-            <a:pPr algn="ctr"/>
-            <a:r>
-              <a:rPr lang="en-US" sz="675" b="1">
-                <a:solidFill>
-                  <a:srgbClr val="787B7F"/>
-                </a:solidFill>
-                <a:latin typeface="Inter"/>
-                <a:ea typeface="Inter"/>
-              </a:rPr>
-              <a:t>NEXT</a:t>
-            </a:r>
-            <a:endParaRPr lang="en-US"/>
-          </a:p>
-        </p:txBody>
-      </p:sp>
-      <p:sp>
-        <p:nvSpPr>
-          <p:cNvPr id="14" name="top-rule"/>
-          <p:cNvSpPr/>
-          <p:nvPr/>
-        </p:nvSpPr>
-        <p:spPr>
-          <a:xfrm xmlns:a="http://schemas.openxmlformats.org/drawingml/2006/main">
-            <a:off x="838200" y="666750"/>
-            <a:ext cx="13563600" cy="0"/>
+            <a:off x="914400" y="419100"/>
+            <a:ext cx="13411200" cy="0"/>
           </a:xfrm>
           <a:prstGeom xmlns:a="http://schemas.openxmlformats.org/drawingml/2006/main" prst="line">
             <a:avLst/>
@@ -701,29 +283,29 @@
       </p:sp>
       <p:sp>
         <p:nvSpPr>
-          <p:cNvPr id="15" name="eyebrow"/>
-          <p:cNvSpPr txBox="1"/>
-          <p:nvPr/>
-        </p:nvSpPr>
-        <p:spPr>
-          <a:xfrm xmlns:a="http://schemas.openxmlformats.org/drawingml/2006/main">
-            <a:off x="914400" y="895350"/>
-            <a:ext cx="7239000" cy="228600"/>
-          </a:xfrm>
-          <a:prstGeom xmlns:a="http://schemas.openxmlformats.org/drawingml/2006/main" prst="rect">
-            <a:avLst/>
-          </a:prstGeom>
-          <a:noFill xmlns:a="http://schemas.openxmlformats.org/drawingml/2006/main"/>
-          <a:ln xmlns:a="http://schemas.openxmlformats.org/drawingml/2006/main" w="0">
-            <a:noFill/>
-          </a:ln>
-        </p:spPr>
-        <p:txBody>
-          <a:bodyPr xmlns:a="http://schemas.openxmlformats.org/drawingml/2006/main" wrap="square" lIns="0" tIns="0" rIns="0" bIns="0" anchor="t"/>
-          <a:lstStyle xmlns:a="http://schemas.openxmlformats.org/drawingml/2006/main"/>
-          <a:p xmlns:a="http://schemas.openxmlformats.org/drawingml/2006/main">
-            <a:r>
-              <a:rPr lang="en-US" sz="1200" b="1">
+          <p:cNvPr id="4" name="blue-flame-cover-eyebrow"/>
+          <p:cNvSpPr txBox="1"/>
+          <p:nvPr/>
+        </p:nvSpPr>
+        <p:spPr>
+          <a:xfrm xmlns:a="http://schemas.openxmlformats.org/drawingml/2006/main">
+            <a:off x="914400" y="628650"/>
+            <a:ext cx="7239000" cy="209550"/>
+          </a:xfrm>
+          <a:prstGeom xmlns:a="http://schemas.openxmlformats.org/drawingml/2006/main" prst="rect">
+            <a:avLst/>
+          </a:prstGeom>
+          <a:noFill xmlns:a="http://schemas.openxmlformats.org/drawingml/2006/main"/>
+          <a:ln xmlns:a="http://schemas.openxmlformats.org/drawingml/2006/main" w="0">
+            <a:noFill/>
+          </a:ln>
+        </p:spPr>
+        <p:txBody>
+          <a:bodyPr xmlns:a="http://schemas.openxmlformats.org/drawingml/2006/main" wrap="square" lIns="0" tIns="0" rIns="0" bIns="0" anchor="t"/>
+          <a:lstStyle xmlns:a="http://schemas.openxmlformats.org/drawingml/2006/main"/>
+          <a:p xmlns:a="http://schemas.openxmlformats.org/drawingml/2006/main">
+            <a:r>
+              <a:rPr lang="en-US" sz="1050" b="1">
                 <a:solidFill>
                   <a:srgbClr val="20BBD8"/>
                 </a:solidFill>
@@ -738,29 +320,29 @@
       </p:sp>
       <p:sp>
         <p:nvSpPr>
-          <p:cNvPr id="16" name="cover-title"/>
-          <p:cNvSpPr txBox="1"/>
-          <p:nvPr/>
-        </p:nvSpPr>
-        <p:spPr>
-          <a:xfrm xmlns:a="http://schemas.openxmlformats.org/drawingml/2006/main">
-            <a:off x="914400" y="1571625"/>
-            <a:ext cx="8382000" cy="1066800"/>
-          </a:xfrm>
-          <a:prstGeom xmlns:a="http://schemas.openxmlformats.org/drawingml/2006/main" prst="rect">
-            <a:avLst/>
-          </a:prstGeom>
-          <a:noFill xmlns:a="http://schemas.openxmlformats.org/drawingml/2006/main"/>
-          <a:ln xmlns:a="http://schemas.openxmlformats.org/drawingml/2006/main" w="0">
-            <a:noFill/>
-          </a:ln>
-        </p:spPr>
-        <p:txBody>
-          <a:bodyPr xmlns:a="http://schemas.openxmlformats.org/drawingml/2006/main" wrap="square" lIns="0" tIns="0" rIns="0" bIns="0" anchor="t"/>
-          <a:lstStyle xmlns:a="http://schemas.openxmlformats.org/drawingml/2006/main"/>
-          <a:p xmlns:a="http://schemas.openxmlformats.org/drawingml/2006/main">
-            <a:r>
-              <a:rPr lang="en-US" sz="3600" b="1">
+          <p:cNvPr id="5" name="cover-title"/>
+          <p:cNvSpPr txBox="1"/>
+          <p:nvPr/>
+        </p:nvSpPr>
+        <p:spPr>
+          <a:xfrm xmlns:a="http://schemas.openxmlformats.org/drawingml/2006/main">
+            <a:off x="914400" y="1009650"/>
+            <a:ext cx="10668000" cy="609600"/>
+          </a:xfrm>
+          <a:prstGeom xmlns:a="http://schemas.openxmlformats.org/drawingml/2006/main" prst="rect">
+            <a:avLst/>
+          </a:prstGeom>
+          <a:noFill xmlns:a="http://schemas.openxmlformats.org/drawingml/2006/main"/>
+          <a:ln xmlns:a="http://schemas.openxmlformats.org/drawingml/2006/main" w="0">
+            <a:noFill/>
+          </a:ln>
+        </p:spPr>
+        <p:txBody>
+          <a:bodyPr xmlns:a="http://schemas.openxmlformats.org/drawingml/2006/main" wrap="square" lIns="0" tIns="0" rIns="0" bIns="0" anchor="t"/>
+          <a:lstStyle xmlns:a="http://schemas.openxmlformats.org/drawingml/2006/main"/>
+          <a:p xmlns:a="http://schemas.openxmlformats.org/drawingml/2006/main">
+            <a:r>
+              <a:rPr lang="en-US" sz="2850" b="1">
                 <a:solidFill>
                   <a:srgbClr val="F2F6F8"/>
                 </a:solidFill>
@@ -775,57 +357,131 @@
       </p:sp>
       <p:sp>
         <p:nvSpPr>
-          <p:cNvPr id="17" name="cover-subtitle"/>
-          <p:cNvSpPr txBox="1"/>
-          <p:nvPr/>
-        </p:nvSpPr>
-        <p:spPr>
-          <a:xfrm xmlns:a="http://schemas.openxmlformats.org/drawingml/2006/main">
-            <a:off x="952500" y="2857500"/>
-            <a:ext cx="6858000" cy="323850"/>
-          </a:xfrm>
-          <a:prstGeom xmlns:a="http://schemas.openxmlformats.org/drawingml/2006/main" prst="rect">
-            <a:avLst/>
-          </a:prstGeom>
-          <a:noFill xmlns:a="http://schemas.openxmlformats.org/drawingml/2006/main"/>
-          <a:ln xmlns:a="http://schemas.openxmlformats.org/drawingml/2006/main" w="0">
-            <a:noFill/>
-          </a:ln>
-        </p:spPr>
-        <p:txBody>
-          <a:bodyPr xmlns:a="http://schemas.openxmlformats.org/drawingml/2006/main" wrap="square" lIns="0" tIns="0" rIns="0" bIns="0" anchor="t"/>
-          <a:lstStyle xmlns:a="http://schemas.openxmlformats.org/drawingml/2006/main"/>
-          <a:p xmlns:a="http://schemas.openxmlformats.org/drawingml/2006/main">
-            <a:r>
-              <a:rPr lang="en-US" sz="1725">
+          <p:cNvPr id="6" name="blue-flame-cover-basis"/>
+          <p:cNvSpPr txBox="1"/>
+          <p:nvPr/>
+        </p:nvSpPr>
+        <p:spPr>
+          <a:xfrm xmlns:a="http://schemas.openxmlformats.org/drawingml/2006/main">
+            <a:off x="952500" y="1657350"/>
+            <a:ext cx="8763000" cy="247650"/>
+          </a:xfrm>
+          <a:prstGeom xmlns:a="http://schemas.openxmlformats.org/drawingml/2006/main" prst="rect">
+            <a:avLst/>
+          </a:prstGeom>
+          <a:noFill xmlns:a="http://schemas.openxmlformats.org/drawingml/2006/main"/>
+          <a:ln xmlns:a="http://schemas.openxmlformats.org/drawingml/2006/main" w="0">
+            <a:noFill/>
+          </a:ln>
+        </p:spPr>
+        <p:txBody>
+          <a:bodyPr xmlns:a="http://schemas.openxmlformats.org/drawingml/2006/main" wrap="square" lIns="0" tIns="0" rIns="0" bIns="0" anchor="t"/>
+          <a:lstStyle xmlns:a="http://schemas.openxmlformats.org/drawingml/2006/main"/>
+          <a:p xmlns:a="http://schemas.openxmlformats.org/drawingml/2006/main">
+            <a:r>
+              <a:rPr lang="en-US" sz="1275">
+                <a:solidFill>
+                  <a:srgbClr val="787B7F"/>
+                </a:solidFill>
+                <a:latin typeface="Inter"/>
+                <a:ea typeface="Inter"/>
+              </a:rPr>
+              <a:t>A late-night operating review turns signal into a bounded next move.</a:t>
+            </a:r>
+            <a:endParaRPr lang="en-US"/>
+          </a:p>
+        </p:txBody>
+      </p:sp>
+      <p:sp>
+        <p:nvSpPr>
+          <p:cNvPr id="7" name="blue-flame-kpi-value-0"/>
+          <p:cNvSpPr txBox="1"/>
+          <p:nvPr/>
+        </p:nvSpPr>
+        <p:spPr>
+          <a:xfrm xmlns:a="http://schemas.openxmlformats.org/drawingml/2006/main">
+            <a:off x="952500" y="2076450"/>
+            <a:ext cx="2000250" cy="361950"/>
+          </a:xfrm>
+          <a:prstGeom xmlns:a="http://schemas.openxmlformats.org/drawingml/2006/main" prst="rect">
+            <a:avLst/>
+          </a:prstGeom>
+          <a:noFill xmlns:a="http://schemas.openxmlformats.org/drawingml/2006/main"/>
+          <a:ln xmlns:a="http://schemas.openxmlformats.org/drawingml/2006/main" w="0">
+            <a:noFill/>
+          </a:ln>
+        </p:spPr>
+        <p:txBody>
+          <a:bodyPr xmlns:a="http://schemas.openxmlformats.org/drawingml/2006/main" wrap="square" lIns="0" tIns="0" rIns="0" bIns="0" anchor="t"/>
+          <a:lstStyle xmlns:a="http://schemas.openxmlformats.org/drawingml/2006/main"/>
+          <a:p xmlns:a="http://schemas.openxmlformats.org/drawingml/2006/main">
+            <a:r>
+              <a:rPr lang="en-US" sz="2100" b="1">
                 <a:solidFill>
                   <a:srgbClr val="20BBD8"/>
                 </a:solidFill>
                 <a:latin typeface="Inter"/>
                 <a:ea typeface="Inter"/>
               </a:rPr>
-              <a:t>A clean-room reference for evidence, direction, and a decision.</a:t>
-            </a:r>
-            <a:endParaRPr lang="en-US"/>
-          </a:p>
-        </p:txBody>
-      </p:sp>
-      <p:sp>
-        <p:nvSpPr>
-          <p:cNvPr id="18" name="cover-rule"/>
+              <a:t>3.26m</a:t>
+            </a:r>
+            <a:endParaRPr lang="en-US"/>
+          </a:p>
+        </p:txBody>
+      </p:sp>
+      <p:sp>
+        <p:nvSpPr>
+          <p:cNvPr id="8" name="blue-flame-kpi-label-0"/>
+          <p:cNvSpPr txBox="1"/>
+          <p:nvPr/>
+        </p:nvSpPr>
+        <p:spPr>
+          <a:xfrm xmlns:a="http://schemas.openxmlformats.org/drawingml/2006/main">
+            <a:off x="952500" y="2457450"/>
+            <a:ext cx="2000250" cy="190500"/>
+          </a:xfrm>
+          <a:prstGeom xmlns:a="http://schemas.openxmlformats.org/drawingml/2006/main" prst="rect">
+            <a:avLst/>
+          </a:prstGeom>
+          <a:noFill xmlns:a="http://schemas.openxmlformats.org/drawingml/2006/main"/>
+          <a:ln xmlns:a="http://schemas.openxmlformats.org/drawingml/2006/main" w="0">
+            <a:noFill/>
+          </a:ln>
+        </p:spPr>
+        <p:txBody>
+          <a:bodyPr xmlns:a="http://schemas.openxmlformats.org/drawingml/2006/main" wrap="square" lIns="0" tIns="0" rIns="0" bIns="0" anchor="t"/>
+          <a:lstStyle xmlns:a="http://schemas.openxmlformats.org/drawingml/2006/main"/>
+          <a:p xmlns:a="http://schemas.openxmlformats.org/drawingml/2006/main">
+            <a:r>
+              <a:rPr lang="en-US" sz="975">
+                <a:solidFill>
+                  <a:srgbClr val="787B7F"/>
+                </a:solidFill>
+                <a:latin typeface="Inter"/>
+                <a:ea typeface="Inter"/>
+              </a:rPr>
+              <a:t>orders observed</a:t>
+            </a:r>
+            <a:endParaRPr lang="en-US"/>
+          </a:p>
+        </p:txBody>
+      </p:sp>
+      <p:sp>
+        <p:nvSpPr>
+          <p:cNvPr id="9" name="blue-flame-kpi-rule-0"/>
           <p:cNvSpPr/>
           <p:nvPr/>
         </p:nvSpPr>
         <p:spPr>
           <a:xfrm xmlns:a="http://schemas.openxmlformats.org/drawingml/2006/main">
-            <a:off x="914400" y="3524250"/>
-            <a:ext cx="7658100" cy="0"/>
+            <a:off x="3162300" y="2038350"/>
+            <a:ext cx="0" cy="609600"/>
           </a:xfrm>
           <a:prstGeom xmlns:a="http://schemas.openxmlformats.org/drawingml/2006/main" prst="line">
             <a:avLst/>
           </a:prstGeom>
           <a:noFill xmlns:a="http://schemas.openxmlformats.org/drawingml/2006/main"/>
-          <a:ln xmlns:a="http://schemas.openxmlformats.org/drawingml/2006/main" w="25400">
+          <a:ln xmlns:a="http://schemas.openxmlformats.org/drawingml/2006/main" w="12700">
             <a:solidFill>
               <a:srgbClr val="787B7F"/>
             </a:solidFill>
@@ -846,173 +502,96 @@
       </p:sp>
       <p:sp>
         <p:nvSpPr>
-          <p:cNvPr id="19" name="cover-basis"/>
-          <p:cNvSpPr txBox="1"/>
-          <p:nvPr/>
-        </p:nvSpPr>
-        <p:spPr>
-          <a:xfrm xmlns:a="http://schemas.openxmlformats.org/drawingml/2006/main">
-            <a:off x="952500" y="3762375"/>
-            <a:ext cx="7810500" cy="266700"/>
-          </a:xfrm>
-          <a:prstGeom xmlns:a="http://schemas.openxmlformats.org/drawingml/2006/main" prst="rect">
-            <a:avLst/>
-          </a:prstGeom>
-          <a:noFill xmlns:a="http://schemas.openxmlformats.org/drawingml/2006/main"/>
-          <a:ln xmlns:a="http://schemas.openxmlformats.org/drawingml/2006/main" w="0">
-            <a:noFill/>
-          </a:ln>
-        </p:spPr>
-        <p:txBody>
-          <a:bodyPr xmlns:a="http://schemas.openxmlformats.org/drawingml/2006/main" wrap="square" lIns="0" tIns="0" rIns="0" bIns="0" anchor="t"/>
-          <a:lstStyle xmlns:a="http://schemas.openxmlformats.org/drawingml/2006/main"/>
-          <a:p xmlns:a="http://schemas.openxmlformats.org/drawingml/2006/main">
-            <a:r>
-              <a:rPr lang="en-US" sz="1350">
+          <p:cNvPr id="10" name="blue-flame-kpi-value-1"/>
+          <p:cNvSpPr txBox="1"/>
+          <p:nvPr/>
+        </p:nvSpPr>
+        <p:spPr>
+          <a:xfrm xmlns:a="http://schemas.openxmlformats.org/drawingml/2006/main">
+            <a:off x="3524250" y="2076450"/>
+            <a:ext cx="2000250" cy="361950"/>
+          </a:xfrm>
+          <a:prstGeom xmlns:a="http://schemas.openxmlformats.org/drawingml/2006/main" prst="rect">
+            <a:avLst/>
+          </a:prstGeom>
+          <a:noFill xmlns:a="http://schemas.openxmlformats.org/drawingml/2006/main"/>
+          <a:ln xmlns:a="http://schemas.openxmlformats.org/drawingml/2006/main" w="0">
+            <a:noFill/>
+          </a:ln>
+        </p:spPr>
+        <p:txBody>
+          <a:bodyPr xmlns:a="http://schemas.openxmlformats.org/drawingml/2006/main" wrap="square" lIns="0" tIns="0" rIns="0" bIns="0" anchor="t"/>
+          <a:lstStyle xmlns:a="http://schemas.openxmlformats.org/drawingml/2006/main"/>
+          <a:p xmlns:a="http://schemas.openxmlformats.org/drawingml/2006/main">
+            <a:r>
+              <a:rPr lang="en-US" sz="2100" b="1">
                 <a:solidFill>
                   <a:srgbClr val="F2F6F8"/>
                 </a:solidFill>
                 <a:latin typeface="Inter"/>
                 <a:ea typeface="Inter"/>
               </a:rPr>
-              <a:t>One visual language · four page roles · native editable objects</a:t>
-            </a:r>
-            <a:endParaRPr lang="en-US"/>
-          </a:p>
-        </p:txBody>
-      </p:sp>
-      <p:sp>
-        <p:nvSpPr>
-          <p:cNvPr id="20" name="cover-thesis"/>
-          <p:cNvSpPr txBox="1"/>
-          <p:nvPr/>
-        </p:nvSpPr>
-        <p:spPr>
-          <a:xfrm xmlns:a="http://schemas.openxmlformats.org/drawingml/2006/main">
-            <a:off x="952500" y="4810125"/>
-            <a:ext cx="6667500" cy="628650"/>
-          </a:xfrm>
-          <a:prstGeom xmlns:a="http://schemas.openxmlformats.org/drawingml/2006/main" prst="rect">
-            <a:avLst/>
-          </a:prstGeom>
-          <a:noFill xmlns:a="http://schemas.openxmlformats.org/drawingml/2006/main"/>
-          <a:ln xmlns:a="http://schemas.openxmlformats.org/drawingml/2006/main" w="0">
-            <a:noFill/>
-          </a:ln>
-        </p:spPr>
-        <p:txBody>
-          <a:bodyPr xmlns:a="http://schemas.openxmlformats.org/drawingml/2006/main" wrap="square" lIns="0" tIns="0" rIns="0" bIns="0" anchor="t"/>
-          <a:lstStyle xmlns:a="http://schemas.openxmlformats.org/drawingml/2006/main"/>
-          <a:p xmlns:a="http://schemas.openxmlformats.org/drawingml/2006/main">
-            <a:r>
-              <a:rPr lang="en-US" sz="1875" b="1">
-                <a:solidFill>
-                  <a:srgbClr val="F2F6F8"/>
-                </a:solidFill>
-                <a:latin typeface="Inter"/>
-                <a:ea typeface="Inter"/>
-              </a:rPr>
-              <a:t>A visible operating signal creates a shared next action.</a:t>
-            </a:r>
-            <a:endParaRPr lang="en-US"/>
-          </a:p>
-        </p:txBody>
-      </p:sp>
-      <p:sp>
-        <p:nvSpPr>
-          <p:cNvPr id="21" name="cover-source"/>
-          <p:cNvSpPr txBox="1"/>
-          <p:nvPr/>
-        </p:nvSpPr>
-        <p:spPr>
-          <a:xfrm xmlns:a="http://schemas.openxmlformats.org/drawingml/2006/main">
-            <a:off x="952500" y="7315200"/>
-            <a:ext cx="9048750" cy="228600"/>
-          </a:xfrm>
-          <a:prstGeom xmlns:a="http://schemas.openxmlformats.org/drawingml/2006/main" prst="rect">
-            <a:avLst/>
-          </a:prstGeom>
-          <a:noFill xmlns:a="http://schemas.openxmlformats.org/drawingml/2006/main"/>
-          <a:ln xmlns:a="http://schemas.openxmlformats.org/drawingml/2006/main" w="0">
-            <a:noFill/>
-          </a:ln>
-        </p:spPr>
-        <p:txBody>
-          <a:bodyPr xmlns:a="http://schemas.openxmlformats.org/drawingml/2006/main" wrap="square" lIns="0" tIns="0" rIns="0" bIns="0" anchor="t"/>
-          <a:lstStyle xmlns:a="http://schemas.openxmlformats.org/drawingml/2006/main"/>
-          <a:p xmlns:a="http://schemas.openxmlformats.org/drawingml/2006/main">
-            <a:r>
-              <a:rPr lang="en-US" sz="1050">
+              <a:t>31m</a:t>
+            </a:r>
+            <a:endParaRPr lang="en-US"/>
+          </a:p>
+        </p:txBody>
+      </p:sp>
+      <p:sp>
+        <p:nvSpPr>
+          <p:cNvPr id="11" name="blue-flame-kpi-label-1"/>
+          <p:cNvSpPr txBox="1"/>
+          <p:nvPr/>
+        </p:nvSpPr>
+        <p:spPr>
+          <a:xfrm xmlns:a="http://schemas.openxmlformats.org/drawingml/2006/main">
+            <a:off x="3524250" y="2457450"/>
+            <a:ext cx="2000250" cy="190500"/>
+          </a:xfrm>
+          <a:prstGeom xmlns:a="http://schemas.openxmlformats.org/drawingml/2006/main" prst="rect">
+            <a:avLst/>
+          </a:prstGeom>
+          <a:noFill xmlns:a="http://schemas.openxmlformats.org/drawingml/2006/main"/>
+          <a:ln xmlns:a="http://schemas.openxmlformats.org/drawingml/2006/main" w="0">
+            <a:noFill/>
+          </a:ln>
+        </p:spPr>
+        <p:txBody>
+          <a:bodyPr xmlns:a="http://schemas.openxmlformats.org/drawingml/2006/main" wrap="square" lIns="0" tIns="0" rIns="0" bIns="0" anchor="t"/>
+          <a:lstStyle xmlns:a="http://schemas.openxmlformats.org/drawingml/2006/main"/>
+          <a:p xmlns:a="http://schemas.openxmlformats.org/drawingml/2006/main">
+            <a:r>
+              <a:rPr lang="en-US" sz="975">
                 <a:solidFill>
                   <a:srgbClr val="787B7F"/>
                 </a:solidFill>
                 <a:latin typeface="Inter"/>
                 <a:ea typeface="Inter"/>
               </a:rPr>
-              <a:t>OfficeKit original clean-room calibration · fictional content · 2026-08-29</a:t>
-            </a:r>
-            <a:endParaRPr lang="en-US"/>
-          </a:p>
-        </p:txBody>
-      </p:sp>
-      <p:sp>
-        <p:nvSpPr>
-          <p:cNvPr id="22" name="page-number"/>
-          <p:cNvSpPr txBox="1"/>
-          <p:nvPr/>
-        </p:nvSpPr>
-        <p:spPr>
-          <a:xfrm xmlns:a="http://schemas.openxmlformats.org/drawingml/2006/main">
-            <a:off x="13335000" y="7810500"/>
-            <a:ext cx="952500" cy="209550"/>
-          </a:xfrm>
-          <a:prstGeom xmlns:a="http://schemas.openxmlformats.org/drawingml/2006/main" prst="rect">
-            <a:avLst/>
-          </a:prstGeom>
-          <a:noFill xmlns:a="http://schemas.openxmlformats.org/drawingml/2006/main"/>
-          <a:ln xmlns:a="http://schemas.openxmlformats.org/drawingml/2006/main" w="0">
-            <a:noFill/>
-          </a:ln>
-        </p:spPr>
-        <p:txBody>
-          <a:bodyPr xmlns:a="http://schemas.openxmlformats.org/drawingml/2006/main" wrap="square" lIns="0" tIns="0" rIns="0" bIns="0" anchor="t"/>
-          <a:lstStyle xmlns:a="http://schemas.openxmlformats.org/drawingml/2006/main"/>
-          <a:p xmlns:a="http://schemas.openxmlformats.org/drawingml/2006/main">
-            <a:pPr algn="r"/>
-            <a:r>
-              <a:rPr lang="en-US" sz="1050">
-                <a:solidFill>
-                  <a:srgbClr val="787B7F"/>
-                </a:solidFill>
-                <a:latin typeface="Inter"/>
-                <a:ea typeface="Inter"/>
-              </a:rPr>
-              <a:t>1 / 6</a:t>
-            </a:r>
-            <a:endParaRPr lang="en-US"/>
-          </a:p>
-        </p:txBody>
-      </p:sp>
-      <p:sp>
-        <p:nvSpPr>
-          <p:cNvPr id="23" name="anchor-field"/>
+              <a:t>avg. handoff</a:t>
+            </a:r>
+            <a:endParaRPr lang="en-US"/>
+          </a:p>
+        </p:txBody>
+      </p:sp>
+      <p:sp>
+        <p:nvSpPr>
+          <p:cNvPr id="12" name="blue-flame-kpi-rule-1"/>
           <p:cNvSpPr/>
           <p:nvPr/>
         </p:nvSpPr>
         <p:spPr>
           <a:xfrm xmlns:a="http://schemas.openxmlformats.org/drawingml/2006/main">
-            <a:off x="11620500" y="1790700"/>
-            <a:ext cx="2095500" cy="2286000"/>
-          </a:xfrm>
-          <a:prstGeom xmlns:a="http://schemas.openxmlformats.org/drawingml/2006/main" prst="rect">
-            <a:avLst/>
-          </a:prstGeom>
-          <a:solidFill xmlns:a="http://schemas.openxmlformats.org/drawingml/2006/main">
-            <a:srgbClr val="131A24"/>
-          </a:solidFill>
-          <a:ln xmlns:a="http://schemas.openxmlformats.org/drawingml/2006/main" w="25400">
+            <a:off x="5734050" y="2038350"/>
+            <a:ext cx="0" cy="609600"/>
+          </a:xfrm>
+          <a:prstGeom xmlns:a="http://schemas.openxmlformats.org/drawingml/2006/main" prst="line">
+            <a:avLst/>
+          </a:prstGeom>
+          <a:noFill xmlns:a="http://schemas.openxmlformats.org/drawingml/2006/main"/>
+          <a:ln xmlns:a="http://schemas.openxmlformats.org/drawingml/2006/main" w="12700">
             <a:solidFill>
-              <a:srgbClr val="20BBD8"/>
+              <a:srgbClr val="787B7F"/>
             </a:solidFill>
             <a:prstDash val="solid"/>
           </a:ln>
@@ -1031,21 +610,116 @@
       </p:sp>
       <p:sp>
         <p:nvSpPr>
-          <p:cNvPr id="24" name="anchor-grid-0-0"/>
+          <p:cNvPr id="13" name="blue-flame-kpi-value-2"/>
+          <p:cNvSpPr txBox="1"/>
+          <p:nvPr/>
+        </p:nvSpPr>
+        <p:spPr>
+          <a:xfrm xmlns:a="http://schemas.openxmlformats.org/drawingml/2006/main">
+            <a:off x="6096000" y="2076450"/>
+            <a:ext cx="2000250" cy="361950"/>
+          </a:xfrm>
+          <a:prstGeom xmlns:a="http://schemas.openxmlformats.org/drawingml/2006/main" prst="rect">
+            <a:avLst/>
+          </a:prstGeom>
+          <a:noFill xmlns:a="http://schemas.openxmlformats.org/drawingml/2006/main"/>
+          <a:ln xmlns:a="http://schemas.openxmlformats.org/drawingml/2006/main" w="0">
+            <a:noFill/>
+          </a:ln>
+        </p:spPr>
+        <p:txBody>
+          <a:bodyPr xmlns:a="http://schemas.openxmlformats.org/drawingml/2006/main" wrap="square" lIns="0" tIns="0" rIns="0" bIns="0" anchor="t"/>
+          <a:lstStyle xmlns:a="http://schemas.openxmlformats.org/drawingml/2006/main"/>
+          <a:p xmlns:a="http://schemas.openxmlformats.org/drawingml/2006/main">
+            <a:r>
+              <a:rPr lang="en-US" sz="2100" b="1">
+                <a:solidFill>
+                  <a:srgbClr val="20BBD8"/>
+                </a:solidFill>
+                <a:latin typeface="Inter"/>
+                <a:ea typeface="Inter"/>
+              </a:rPr>
+              <a:t>5.1m</a:t>
+            </a:r>
+            <a:endParaRPr lang="en-US"/>
+          </a:p>
+        </p:txBody>
+      </p:sp>
+      <p:sp>
+        <p:nvSpPr>
+          <p:cNvPr id="14" name="blue-flame-kpi-label-2"/>
+          <p:cNvSpPr txBox="1"/>
+          <p:nvPr/>
+        </p:nvSpPr>
+        <p:spPr>
+          <a:xfrm xmlns:a="http://schemas.openxmlformats.org/drawingml/2006/main">
+            <a:off x="6096000" y="2457450"/>
+            <a:ext cx="2000250" cy="190500"/>
+          </a:xfrm>
+          <a:prstGeom xmlns:a="http://schemas.openxmlformats.org/drawingml/2006/main" prst="rect">
+            <a:avLst/>
+          </a:prstGeom>
+          <a:noFill xmlns:a="http://schemas.openxmlformats.org/drawingml/2006/main"/>
+          <a:ln xmlns:a="http://schemas.openxmlformats.org/drawingml/2006/main" w="0">
+            <a:noFill/>
+          </a:ln>
+        </p:spPr>
+        <p:txBody>
+          <a:bodyPr xmlns:a="http://schemas.openxmlformats.org/drawingml/2006/main" wrap="square" lIns="0" tIns="0" rIns="0" bIns="0" anchor="t"/>
+          <a:lstStyle xmlns:a="http://schemas.openxmlformats.org/drawingml/2006/main"/>
+          <a:p xmlns:a="http://schemas.openxmlformats.org/drawingml/2006/main">
+            <a:r>
+              <a:rPr lang="en-US" sz="975">
+                <a:solidFill>
+                  <a:srgbClr val="787B7F"/>
+                </a:solidFill>
+                <a:latin typeface="Inter"/>
+                <a:ea typeface="Inter"/>
+              </a:rPr>
+              <a:t>cost variance</a:t>
+            </a:r>
+            <a:endParaRPr lang="en-US"/>
+          </a:p>
+        </p:txBody>
+      </p:sp>
+      <p:pic>
+        <p:nvPicPr>
+          <p:cNvPr id="15" name="blue-flame-cover-photo" descr="Documentary operating scene used as the cover evidence band"/>
+          <p:cNvPicPr/>
+          <p:nvPr/>
+        </p:nvPicPr>
+        <p:blipFill>
+          <a:blip xmlns:r="http://schemas.openxmlformats.org/officeDocument/2006/relationships" xmlns:a="http://schemas.openxmlformats.org/drawingml/2006/main" r:embed="rIdOfficeKitImage0d3bd4b5ccdd7cbb_1"/>
+          <a:srcRect xmlns:a="http://schemas.openxmlformats.org/drawingml/2006/main" l="0" t="45645" r="0" b="45645"/>
+          <a:stretch xmlns:a="http://schemas.openxmlformats.org/drawingml/2006/main">
+            <a:fillRect/>
+          </a:stretch>
+        </p:blipFill>
+        <p:spPr>
+          <a:xfrm xmlns:a="http://schemas.openxmlformats.org/drawingml/2006/main">
+            <a:off x="914400" y="3105150"/>
+            <a:ext cx="13411200" cy="2076450"/>
+          </a:xfrm>
+          <a:prstGeom xmlns:a="http://schemas.openxmlformats.org/drawingml/2006/main" prst="rect">
+            <a:avLst/>
+          </a:prstGeom>
+        </p:spPr>
+      </p:pic>
+      <p:sp>
+        <p:nvSpPr>
+          <p:cNvPr id="16" name="blue-flame-photo-frame"/>
           <p:cNvSpPr/>
           <p:nvPr/>
         </p:nvSpPr>
         <p:spPr>
           <a:xfrm xmlns:a="http://schemas.openxmlformats.org/drawingml/2006/main">
-            <a:off x="11925300" y="2152650"/>
-            <a:ext cx="266700" cy="285750"/>
-          </a:xfrm>
-          <a:prstGeom xmlns:a="http://schemas.openxmlformats.org/drawingml/2006/main" prst="rect">
-            <a:avLst/>
-          </a:prstGeom>
-          <a:solidFill xmlns:a="http://schemas.openxmlformats.org/drawingml/2006/main">
-            <a:srgbClr val="20BBD8"/>
-          </a:solidFill>
+            <a:off x="914400" y="3105150"/>
+            <a:ext cx="13411200" cy="2076450"/>
+          </a:xfrm>
+          <a:prstGeom xmlns:a="http://schemas.openxmlformats.org/drawingml/2006/main" prst="rect">
+            <a:avLst/>
+          </a:prstGeom>
+          <a:noFill xmlns:a="http://schemas.openxmlformats.org/drawingml/2006/main"/>
           <a:ln xmlns:a="http://schemas.openxmlformats.org/drawingml/2006/main" w="12700">
             <a:solidFill>
               <a:srgbClr val="20BBD8"/>
@@ -1067,24 +741,22 @@
       </p:sp>
       <p:sp>
         <p:nvSpPr>
-          <p:cNvPr id="25" name="anchor-grid-0-1"/>
+          <p:cNvPr id="17" name="blue-flame-cover-footer-rule"/>
           <p:cNvSpPr/>
           <p:nvPr/>
         </p:nvSpPr>
         <p:spPr>
           <a:xfrm xmlns:a="http://schemas.openxmlformats.org/drawingml/2006/main">
-            <a:off x="12420600" y="2152650"/>
-            <a:ext cx="266700" cy="285750"/>
-          </a:xfrm>
-          <a:prstGeom xmlns:a="http://schemas.openxmlformats.org/drawingml/2006/main" prst="rect">
-            <a:avLst/>
-          </a:prstGeom>
-          <a:solidFill xmlns:a="http://schemas.openxmlformats.org/drawingml/2006/main">
-            <a:srgbClr val="20BBD8"/>
-          </a:solidFill>
+            <a:off x="914400" y="6553200"/>
+            <a:ext cx="13411200" cy="0"/>
+          </a:xfrm>
+          <a:prstGeom xmlns:a="http://schemas.openxmlformats.org/drawingml/2006/main" prst="line">
+            <a:avLst/>
+          </a:prstGeom>
+          <a:noFill xmlns:a="http://schemas.openxmlformats.org/drawingml/2006/main"/>
           <a:ln xmlns:a="http://schemas.openxmlformats.org/drawingml/2006/main" w="12700">
             <a:solidFill>
-              <a:srgbClr val="20BBD8"/>
+              <a:srgbClr val="787B7F"/>
             </a:solidFill>
             <a:prstDash val="solid"/>
           </a:ln>
@@ -1103,285 +775,111 @@
       </p:sp>
       <p:sp>
         <p:nvSpPr>
-          <p:cNvPr id="26" name="anchor-grid-0-2"/>
-          <p:cNvSpPr/>
-          <p:nvPr/>
-        </p:nvSpPr>
-        <p:spPr>
-          <a:xfrm xmlns:a="http://schemas.openxmlformats.org/drawingml/2006/main">
-            <a:off x="12915900" y="2152650"/>
-            <a:ext cx="266700" cy="285750"/>
-          </a:xfrm>
-          <a:prstGeom xmlns:a="http://schemas.openxmlformats.org/drawingml/2006/main" prst="rect">
-            <a:avLst/>
-          </a:prstGeom>
-          <a:solidFill xmlns:a="http://schemas.openxmlformats.org/drawingml/2006/main">
-            <a:srgbClr val="070A10"/>
-          </a:solidFill>
-          <a:ln xmlns:a="http://schemas.openxmlformats.org/drawingml/2006/main" w="12700">
-            <a:solidFill>
-              <a:srgbClr val="20BBD8"/>
-            </a:solidFill>
-            <a:prstDash val="solid"/>
-          </a:ln>
-        </p:spPr>
-        <p:txBody>
-          <a:bodyPr xmlns:a="http://schemas.openxmlformats.org/drawingml/2006/main" wrap="square" lIns="0" tIns="0" rIns="0" bIns="0" anchor="t"/>
-          <a:lstStyle xmlns:a="http://schemas.openxmlformats.org/drawingml/2006/main"/>
-          <a:p xmlns:a="http://schemas.openxmlformats.org/drawingml/2006/main">
-            <a:r>
-              <a:rPr lang="en-US"/>
-              <a:t/>
-            </a:r>
-            <a:endParaRPr lang="en-US"/>
-          </a:p>
-        </p:txBody>
-      </p:sp>
-      <p:sp>
-        <p:nvSpPr>
-          <p:cNvPr id="27" name="anchor-grid-1-0"/>
-          <p:cNvSpPr/>
-          <p:nvPr/>
-        </p:nvSpPr>
-        <p:spPr>
-          <a:xfrm xmlns:a="http://schemas.openxmlformats.org/drawingml/2006/main">
-            <a:off x="11925300" y="2686050"/>
-            <a:ext cx="266700" cy="285750"/>
-          </a:xfrm>
-          <a:prstGeom xmlns:a="http://schemas.openxmlformats.org/drawingml/2006/main" prst="rect">
-            <a:avLst/>
-          </a:prstGeom>
-          <a:solidFill xmlns:a="http://schemas.openxmlformats.org/drawingml/2006/main">
-            <a:srgbClr val="20BBD8"/>
-          </a:solidFill>
-          <a:ln xmlns:a="http://schemas.openxmlformats.org/drawingml/2006/main" w="12700">
-            <a:solidFill>
-              <a:srgbClr val="20BBD8"/>
-            </a:solidFill>
-            <a:prstDash val="solid"/>
-          </a:ln>
-        </p:spPr>
-        <p:txBody>
-          <a:bodyPr xmlns:a="http://schemas.openxmlformats.org/drawingml/2006/main" wrap="square" lIns="0" tIns="0" rIns="0" bIns="0" anchor="t"/>
-          <a:lstStyle xmlns:a="http://schemas.openxmlformats.org/drawingml/2006/main"/>
-          <a:p xmlns:a="http://schemas.openxmlformats.org/drawingml/2006/main">
-            <a:r>
-              <a:rPr lang="en-US"/>
-              <a:t/>
-            </a:r>
-            <a:endParaRPr lang="en-US"/>
-          </a:p>
-        </p:txBody>
-      </p:sp>
-      <p:sp>
-        <p:nvSpPr>
-          <p:cNvPr id="28" name="anchor-grid-1-1"/>
-          <p:cNvSpPr/>
-          <p:nvPr/>
-        </p:nvSpPr>
-        <p:spPr>
-          <a:xfrm xmlns:a="http://schemas.openxmlformats.org/drawingml/2006/main">
-            <a:off x="12420600" y="2686050"/>
-            <a:ext cx="266700" cy="285750"/>
-          </a:xfrm>
-          <a:prstGeom xmlns:a="http://schemas.openxmlformats.org/drawingml/2006/main" prst="rect">
-            <a:avLst/>
-          </a:prstGeom>
-          <a:solidFill xmlns:a="http://schemas.openxmlformats.org/drawingml/2006/main">
-            <a:srgbClr val="20BBD8"/>
-          </a:solidFill>
-          <a:ln xmlns:a="http://schemas.openxmlformats.org/drawingml/2006/main" w="12700">
-            <a:solidFill>
-              <a:srgbClr val="20BBD8"/>
-            </a:solidFill>
-            <a:prstDash val="solid"/>
-          </a:ln>
-        </p:spPr>
-        <p:txBody>
-          <a:bodyPr xmlns:a="http://schemas.openxmlformats.org/drawingml/2006/main" wrap="square" lIns="0" tIns="0" rIns="0" bIns="0" anchor="t"/>
-          <a:lstStyle xmlns:a="http://schemas.openxmlformats.org/drawingml/2006/main"/>
-          <a:p xmlns:a="http://schemas.openxmlformats.org/drawingml/2006/main">
-            <a:r>
-              <a:rPr lang="en-US"/>
-              <a:t/>
-            </a:r>
-            <a:endParaRPr lang="en-US"/>
-          </a:p>
-        </p:txBody>
-      </p:sp>
-      <p:sp>
-        <p:nvSpPr>
-          <p:cNvPr id="29" name="anchor-grid-1-2"/>
-          <p:cNvSpPr/>
-          <p:nvPr/>
-        </p:nvSpPr>
-        <p:spPr>
-          <a:xfrm xmlns:a="http://schemas.openxmlformats.org/drawingml/2006/main">
-            <a:off x="12915900" y="2686050"/>
-            <a:ext cx="266700" cy="285750"/>
-          </a:xfrm>
-          <a:prstGeom xmlns:a="http://schemas.openxmlformats.org/drawingml/2006/main" prst="rect">
-            <a:avLst/>
-          </a:prstGeom>
-          <a:solidFill xmlns:a="http://schemas.openxmlformats.org/drawingml/2006/main">
-            <a:srgbClr val="070A10"/>
-          </a:solidFill>
-          <a:ln xmlns:a="http://schemas.openxmlformats.org/drawingml/2006/main" w="12700">
-            <a:solidFill>
-              <a:srgbClr val="20BBD8"/>
-            </a:solidFill>
-            <a:prstDash val="solid"/>
-          </a:ln>
-        </p:spPr>
-        <p:txBody>
-          <a:bodyPr xmlns:a="http://schemas.openxmlformats.org/drawingml/2006/main" wrap="square" lIns="0" tIns="0" rIns="0" bIns="0" anchor="t"/>
-          <a:lstStyle xmlns:a="http://schemas.openxmlformats.org/drawingml/2006/main"/>
-          <a:p xmlns:a="http://schemas.openxmlformats.org/drawingml/2006/main">
-            <a:r>
-              <a:rPr lang="en-US"/>
-              <a:t/>
-            </a:r>
-            <a:endParaRPr lang="en-US"/>
-          </a:p>
-        </p:txBody>
-      </p:sp>
-      <p:sp>
-        <p:nvSpPr>
-          <p:cNvPr id="30" name="anchor-grid-2-0"/>
-          <p:cNvSpPr/>
-          <p:nvPr/>
-        </p:nvSpPr>
-        <p:spPr>
-          <a:xfrm xmlns:a="http://schemas.openxmlformats.org/drawingml/2006/main">
-            <a:off x="11925300" y="3219450"/>
-            <a:ext cx="266700" cy="285750"/>
-          </a:xfrm>
-          <a:prstGeom xmlns:a="http://schemas.openxmlformats.org/drawingml/2006/main" prst="rect">
-            <a:avLst/>
-          </a:prstGeom>
-          <a:solidFill xmlns:a="http://schemas.openxmlformats.org/drawingml/2006/main">
-            <a:srgbClr val="20BBD8"/>
-          </a:solidFill>
-          <a:ln xmlns:a="http://schemas.openxmlformats.org/drawingml/2006/main" w="12700">
-            <a:solidFill>
-              <a:srgbClr val="20BBD8"/>
-            </a:solidFill>
-            <a:prstDash val="solid"/>
-          </a:ln>
-        </p:spPr>
-        <p:txBody>
-          <a:bodyPr xmlns:a="http://schemas.openxmlformats.org/drawingml/2006/main" wrap="square" lIns="0" tIns="0" rIns="0" bIns="0" anchor="t"/>
-          <a:lstStyle xmlns:a="http://schemas.openxmlformats.org/drawingml/2006/main"/>
-          <a:p xmlns:a="http://schemas.openxmlformats.org/drawingml/2006/main">
-            <a:r>
-              <a:rPr lang="en-US"/>
-              <a:t/>
-            </a:r>
-            <a:endParaRPr lang="en-US"/>
-          </a:p>
-        </p:txBody>
-      </p:sp>
-      <p:sp>
-        <p:nvSpPr>
-          <p:cNvPr id="31" name="anchor-grid-2-1"/>
-          <p:cNvSpPr/>
-          <p:nvPr/>
-        </p:nvSpPr>
-        <p:spPr>
-          <a:xfrm xmlns:a="http://schemas.openxmlformats.org/drawingml/2006/main">
-            <a:off x="12420600" y="3219450"/>
-            <a:ext cx="266700" cy="285750"/>
-          </a:xfrm>
-          <a:prstGeom xmlns:a="http://schemas.openxmlformats.org/drawingml/2006/main" prst="rect">
-            <a:avLst/>
-          </a:prstGeom>
-          <a:solidFill xmlns:a="http://schemas.openxmlformats.org/drawingml/2006/main">
-            <a:srgbClr val="20BBD8"/>
-          </a:solidFill>
-          <a:ln xmlns:a="http://schemas.openxmlformats.org/drawingml/2006/main" w="12700">
-            <a:solidFill>
-              <a:srgbClr val="20BBD8"/>
-            </a:solidFill>
-            <a:prstDash val="solid"/>
-          </a:ln>
-        </p:spPr>
-        <p:txBody>
-          <a:bodyPr xmlns:a="http://schemas.openxmlformats.org/drawingml/2006/main" wrap="square" lIns="0" tIns="0" rIns="0" bIns="0" anchor="t"/>
-          <a:lstStyle xmlns:a="http://schemas.openxmlformats.org/drawingml/2006/main"/>
-          <a:p xmlns:a="http://schemas.openxmlformats.org/drawingml/2006/main">
-            <a:r>
-              <a:rPr lang="en-US"/>
-              <a:t/>
-            </a:r>
-            <a:endParaRPr lang="en-US"/>
-          </a:p>
-        </p:txBody>
-      </p:sp>
-      <p:sp>
-        <p:nvSpPr>
-          <p:cNvPr id="32" name="anchor-grid-2-2"/>
-          <p:cNvSpPr/>
-          <p:nvPr/>
-        </p:nvSpPr>
-        <p:spPr>
-          <a:xfrm xmlns:a="http://schemas.openxmlformats.org/drawingml/2006/main">
-            <a:off x="12915900" y="3219450"/>
-            <a:ext cx="266700" cy="285750"/>
-          </a:xfrm>
-          <a:prstGeom xmlns:a="http://schemas.openxmlformats.org/drawingml/2006/main" prst="rect">
-            <a:avLst/>
-          </a:prstGeom>
-          <a:solidFill xmlns:a="http://schemas.openxmlformats.org/drawingml/2006/main">
-            <a:srgbClr val="070A10"/>
-          </a:solidFill>
-          <a:ln xmlns:a="http://schemas.openxmlformats.org/drawingml/2006/main" w="12700">
-            <a:solidFill>
-              <a:srgbClr val="20BBD8"/>
-            </a:solidFill>
-            <a:prstDash val="solid"/>
-          </a:ln>
-        </p:spPr>
-        <p:txBody>
-          <a:bodyPr xmlns:a="http://schemas.openxmlformats.org/drawingml/2006/main" wrap="square" lIns="0" tIns="0" rIns="0" bIns="0" anchor="t"/>
-          <a:lstStyle xmlns:a="http://schemas.openxmlformats.org/drawingml/2006/main"/>
-          <a:p xmlns:a="http://schemas.openxmlformats.org/drawingml/2006/main">
-            <a:r>
-              <a:rPr lang="en-US"/>
-              <a:t/>
-            </a:r>
-            <a:endParaRPr lang="en-US"/>
-          </a:p>
-        </p:txBody>
-      </p:sp>
-      <p:sp>
-        <p:nvSpPr>
-          <p:cNvPr id="33" name="anchor-axis"/>
-          <p:cNvSpPr/>
-          <p:nvPr/>
-        </p:nvSpPr>
-        <p:spPr>
-          <a:xfrm xmlns:a="http://schemas.openxmlformats.org/drawingml/2006/main">
-            <a:off x="12668250" y="1638300"/>
-            <a:ext cx="0" cy="2743200"/>
-          </a:xfrm>
-          <a:prstGeom xmlns:a="http://schemas.openxmlformats.org/drawingml/2006/main" prst="line">
-            <a:avLst/>
-          </a:prstGeom>
-          <a:noFill xmlns:a="http://schemas.openxmlformats.org/drawingml/2006/main"/>
-          <a:ln xmlns:a="http://schemas.openxmlformats.org/drawingml/2006/main" w="50800">
-            <a:solidFill>
-              <a:srgbClr val="F2F6F8"/>
-            </a:solidFill>
-            <a:prstDash val="solid"/>
-          </a:ln>
-        </p:spPr>
-        <p:txBody>
-          <a:bodyPr xmlns:a="http://schemas.openxmlformats.org/drawingml/2006/main" wrap="square" lIns="0" tIns="0" rIns="0" bIns="0" anchor="t"/>
-          <a:lstStyle xmlns:a="http://schemas.openxmlformats.org/drawingml/2006/main"/>
-          <a:p xmlns:a="http://schemas.openxmlformats.org/drawingml/2006/main">
-            <a:r>
-              <a:rPr lang="en-US"/>
-              <a:t/>
+          <p:cNvPr id="18" name="blue-flame-cover-thesis"/>
+          <p:cNvSpPr txBox="1"/>
+          <p:nvPr/>
+        </p:nvSpPr>
+        <p:spPr>
+          <a:xfrm xmlns:a="http://schemas.openxmlformats.org/drawingml/2006/main">
+            <a:off x="914400" y="6800850"/>
+            <a:ext cx="10096500" cy="285750"/>
+          </a:xfrm>
+          <a:prstGeom xmlns:a="http://schemas.openxmlformats.org/drawingml/2006/main" prst="rect">
+            <a:avLst/>
+          </a:prstGeom>
+          <a:noFill xmlns:a="http://schemas.openxmlformats.org/drawingml/2006/main"/>
+          <a:ln xmlns:a="http://schemas.openxmlformats.org/drawingml/2006/main" w="0">
+            <a:noFill/>
+          </a:ln>
+        </p:spPr>
+        <p:txBody>
+          <a:bodyPr xmlns:a="http://schemas.openxmlformats.org/drawingml/2006/main" wrap="square" lIns="0" tIns="0" rIns="0" bIns="0" anchor="t"/>
+          <a:lstStyle xmlns:a="http://schemas.openxmlformats.org/drawingml/2006/main"/>
+          <a:p xmlns:a="http://schemas.openxmlformats.org/drawingml/2006/main">
+            <a:r>
+              <a:rPr lang="en-US" sz="1575" b="1">
+                <a:solidFill>
+                  <a:srgbClr val="F2F6F8"/>
+                </a:solidFill>
+                <a:latin typeface="Inter"/>
+                <a:ea typeface="Inter"/>
+              </a:rPr>
+              <a:t>A visible operating signal creates a shared next action.</a:t>
+            </a:r>
+            <a:endParaRPr lang="en-US"/>
+          </a:p>
+        </p:txBody>
+      </p:sp>
+      <p:sp>
+        <p:nvSpPr>
+          <p:cNvPr id="19" name="blue-flame-cover-source"/>
+          <p:cNvSpPr txBox="1"/>
+          <p:nvPr/>
+        </p:nvSpPr>
+        <p:spPr>
+          <a:xfrm xmlns:a="http://schemas.openxmlformats.org/drawingml/2006/main">
+            <a:off x="914400" y="7829550"/>
+            <a:ext cx="10953750" cy="209550"/>
+          </a:xfrm>
+          <a:prstGeom xmlns:a="http://schemas.openxmlformats.org/drawingml/2006/main" prst="rect">
+            <a:avLst/>
+          </a:prstGeom>
+          <a:noFill xmlns:a="http://schemas.openxmlformats.org/drawingml/2006/main"/>
+          <a:ln xmlns:a="http://schemas.openxmlformats.org/drawingml/2006/main" w="0">
+            <a:noFill/>
+          </a:ln>
+        </p:spPr>
+        <p:txBody>
+          <a:bodyPr xmlns:a="http://schemas.openxmlformats.org/drawingml/2006/main" wrap="square" lIns="0" tIns="0" rIns="0" bIns="0" anchor="t"/>
+          <a:lstStyle xmlns:a="http://schemas.openxmlformats.org/drawingml/2006/main"/>
+          <a:p xmlns:a="http://schemas.openxmlformats.org/drawingml/2006/main">
+            <a:r>
+              <a:rPr lang="en-US" sz="1050">
+                <a:solidFill>
+                  <a:srgbClr val="787B7F"/>
+                </a:solidFill>
+                <a:latin typeface="Inter"/>
+                <a:ea typeface="Inter"/>
+              </a:rPr>
+              <a:t>OfficeKit original clean-room calibration · fictional content · 2026-08-29</a:t>
+            </a:r>
+            <a:endParaRPr lang="en-US"/>
+          </a:p>
+        </p:txBody>
+      </p:sp>
+      <p:sp>
+        <p:nvSpPr>
+          <p:cNvPr id="20" name="blue-flame-cover-page-number"/>
+          <p:cNvSpPr txBox="1"/>
+          <p:nvPr/>
+        </p:nvSpPr>
+        <p:spPr>
+          <a:xfrm xmlns:a="http://schemas.openxmlformats.org/drawingml/2006/main">
+            <a:off x="13335000" y="7829550"/>
+            <a:ext cx="952500" cy="209550"/>
+          </a:xfrm>
+          <a:prstGeom xmlns:a="http://schemas.openxmlformats.org/drawingml/2006/main" prst="rect">
+            <a:avLst/>
+          </a:prstGeom>
+          <a:noFill xmlns:a="http://schemas.openxmlformats.org/drawingml/2006/main"/>
+          <a:ln xmlns:a="http://schemas.openxmlformats.org/drawingml/2006/main" w="0">
+            <a:noFill/>
+          </a:ln>
+        </p:spPr>
+        <p:txBody>
+          <a:bodyPr xmlns:a="http://schemas.openxmlformats.org/drawingml/2006/main" wrap="square" lIns="0" tIns="0" rIns="0" bIns="0" anchor="t"/>
+          <a:lstStyle xmlns:a="http://schemas.openxmlformats.org/drawingml/2006/main"/>
+          <a:p xmlns:a="http://schemas.openxmlformats.org/drawingml/2006/main">
+            <a:pPr algn="r"/>
+            <a:r>
+              <a:rPr lang="en-US" sz="1050">
+                <a:solidFill>
+                  <a:srgbClr val="787B7F"/>
+                </a:solidFill>
+                <a:latin typeface="Inter"/>
+                <a:ea typeface="Inter"/>
+              </a:rPr>
+              <a:t>1 / 6</a:t>
             </a:r>
             <a:endParaRPr lang="en-US"/>
           </a:p>
